--- a/slides/presentation_causes_of_deaths_20250109.pptx
+++ b/slides/presentation_causes_of_deaths_20250109.pptx
@@ -5,7 +5,7 @@
     <p:sldMasterId id="2147483648" r:id="rId1"/>
   </p:sldMasterIdLst>
   <p:notesMasterIdLst>
-    <p:notesMasterId r:id="rId22"/>
+    <p:notesMasterId r:id="rId32"/>
   </p:notesMasterIdLst>
   <p:sldIdLst>
     <p:sldId id="401" r:id="rId2"/>
@@ -28,6 +28,16 @@
     <p:sldId id="455" r:id="rId19"/>
     <p:sldId id="460" r:id="rId20"/>
     <p:sldId id="469" r:id="rId21"/>
+    <p:sldId id="470" r:id="rId22"/>
+    <p:sldId id="471" r:id="rId23"/>
+    <p:sldId id="473" r:id="rId24"/>
+    <p:sldId id="472" r:id="rId25"/>
+    <p:sldId id="474" r:id="rId26"/>
+    <p:sldId id="475" r:id="rId27"/>
+    <p:sldId id="477" r:id="rId28"/>
+    <p:sldId id="476" r:id="rId29"/>
+    <p:sldId id="478" r:id="rId30"/>
+    <p:sldId id="479" r:id="rId31"/>
   </p:sldIdLst>
   <p:sldSz cx="12192000" cy="6858000"/>
   <p:notesSz cx="6858000" cy="9144000"/>
@@ -216,7 +226,7 @@
           <a:p>
             <a:fld id="{50A0DC1E-77FB-4FBF-8573-E251C34BEFE9}" type="datetimeFigureOut">
               <a:rPr lang="fr-FR" smtClean="0"/>
-              <a:t>09/01/2025</a:t>
+              <a:t>22/04/2025</a:t>
             </a:fld>
             <a:endParaRPr lang="fr-FR"/>
           </a:p>
@@ -374,7 +384,7 @@
           <a:p>
             <a:fld id="{BA42361D-D732-41E9-826A-2ADAE4A10EE7}" type="slidenum">
               <a:rPr lang="fr-FR" smtClean="0"/>
-              <a:t>‹N°›</a:t>
+              <a:t>‹#›</a:t>
             </a:fld>
             <a:endParaRPr lang="fr-FR"/>
           </a:p>
@@ -2171,6 +2181,762 @@
 </p:notes>
 </file>
 
+<file path=ppt/notesSlides/notesSlide21.xml><?xml version="1.0" encoding="utf-8"?>
+<p:notes xmlns:a="http://schemas.openxmlformats.org/drawingml/2006/main" xmlns:r="http://schemas.openxmlformats.org/officeDocument/2006/relationships" xmlns:p="http://schemas.openxmlformats.org/presentationml/2006/main">
+  <p:cSld>
+    <p:spTree>
+      <p:nvGrpSpPr>
+        <p:cNvPr id="1" name=""/>
+        <p:cNvGrpSpPr/>
+        <p:nvPr/>
+      </p:nvGrpSpPr>
+      <p:grpSpPr>
+        <a:xfrm>
+          <a:off x="0" y="0"/>
+          <a:ext cx="0" cy="0"/>
+          <a:chOff x="0" y="0"/>
+          <a:chExt cx="0" cy="0"/>
+        </a:xfrm>
+      </p:grpSpPr>
+      <p:sp>
+        <p:nvSpPr>
+          <p:cNvPr id="2" name="Slide Image Placeholder 1"/>
+          <p:cNvSpPr>
+            <a:spLocks noGrp="1" noRot="1" noChangeAspect="1"/>
+          </p:cNvSpPr>
+          <p:nvPr>
+            <p:ph type="sldImg"/>
+          </p:nvPr>
+        </p:nvSpPr>
+        <p:spPr/>
+      </p:sp>
+      <p:sp>
+        <p:nvSpPr>
+          <p:cNvPr id="3" name="Notes Placeholder 2"/>
+          <p:cNvSpPr>
+            <a:spLocks noGrp="1"/>
+          </p:cNvSpPr>
+          <p:nvPr>
+            <p:ph type="body" idx="1"/>
+          </p:nvPr>
+        </p:nvSpPr>
+        <p:spPr/>
+        <p:txBody>
+          <a:bodyPr/>
+          <a:lstStyle/>
+          <a:p>
+            <a:endParaRPr lang="fr-CH" dirty="0"/>
+          </a:p>
+        </p:txBody>
+      </p:sp>
+      <p:sp>
+        <p:nvSpPr>
+          <p:cNvPr id="4" name="Slide Number Placeholder 3"/>
+          <p:cNvSpPr>
+            <a:spLocks noGrp="1"/>
+          </p:cNvSpPr>
+          <p:nvPr>
+            <p:ph type="sldNum" sz="quarter" idx="5"/>
+          </p:nvPr>
+        </p:nvSpPr>
+        <p:spPr/>
+        <p:txBody>
+          <a:bodyPr/>
+          <a:lstStyle/>
+          <a:p>
+            <a:fld id="{DF285FF1-5C27-4ACA-95C0-28AC7E173261}" type="slidenum">
+              <a:rPr lang="de-CH" smtClean="0"/>
+              <a:t>21</a:t>
+            </a:fld>
+            <a:endParaRPr lang="de-CH"/>
+          </a:p>
+        </p:txBody>
+      </p:sp>
+    </p:spTree>
+    <p:extLst>
+      <p:ext uri="{BB962C8B-B14F-4D97-AF65-F5344CB8AC3E}">
+        <p14:creationId xmlns:p14="http://schemas.microsoft.com/office/powerpoint/2010/main" val="3929171948"/>
+      </p:ext>
+    </p:extLst>
+  </p:cSld>
+  <p:clrMapOvr>
+    <a:masterClrMapping/>
+  </p:clrMapOvr>
+</p:notes>
+</file>
+
+<file path=ppt/notesSlides/notesSlide22.xml><?xml version="1.0" encoding="utf-8"?>
+<p:notes xmlns:a="http://schemas.openxmlformats.org/drawingml/2006/main" xmlns:r="http://schemas.openxmlformats.org/officeDocument/2006/relationships" xmlns:p="http://schemas.openxmlformats.org/presentationml/2006/main">
+  <p:cSld>
+    <p:spTree>
+      <p:nvGrpSpPr>
+        <p:cNvPr id="1" name=""/>
+        <p:cNvGrpSpPr/>
+        <p:nvPr/>
+      </p:nvGrpSpPr>
+      <p:grpSpPr>
+        <a:xfrm>
+          <a:off x="0" y="0"/>
+          <a:ext cx="0" cy="0"/>
+          <a:chOff x="0" y="0"/>
+          <a:chExt cx="0" cy="0"/>
+        </a:xfrm>
+      </p:grpSpPr>
+      <p:sp>
+        <p:nvSpPr>
+          <p:cNvPr id="2" name="Slide Image Placeholder 1"/>
+          <p:cNvSpPr>
+            <a:spLocks noGrp="1" noRot="1" noChangeAspect="1"/>
+          </p:cNvSpPr>
+          <p:nvPr>
+            <p:ph type="sldImg"/>
+          </p:nvPr>
+        </p:nvSpPr>
+        <p:spPr/>
+      </p:sp>
+      <p:sp>
+        <p:nvSpPr>
+          <p:cNvPr id="3" name="Notes Placeholder 2"/>
+          <p:cNvSpPr>
+            <a:spLocks noGrp="1"/>
+          </p:cNvSpPr>
+          <p:nvPr>
+            <p:ph type="body" idx="1"/>
+          </p:nvPr>
+        </p:nvSpPr>
+        <p:spPr/>
+        <p:txBody>
+          <a:bodyPr/>
+          <a:lstStyle/>
+          <a:p>
+            <a:endParaRPr lang="fr-CH" dirty="0"/>
+          </a:p>
+        </p:txBody>
+      </p:sp>
+      <p:sp>
+        <p:nvSpPr>
+          <p:cNvPr id="4" name="Slide Number Placeholder 3"/>
+          <p:cNvSpPr>
+            <a:spLocks noGrp="1"/>
+          </p:cNvSpPr>
+          <p:nvPr>
+            <p:ph type="sldNum" sz="quarter" idx="5"/>
+          </p:nvPr>
+        </p:nvSpPr>
+        <p:spPr/>
+        <p:txBody>
+          <a:bodyPr/>
+          <a:lstStyle/>
+          <a:p>
+            <a:fld id="{DF285FF1-5C27-4ACA-95C0-28AC7E173261}" type="slidenum">
+              <a:rPr lang="de-CH" smtClean="0"/>
+              <a:t>22</a:t>
+            </a:fld>
+            <a:endParaRPr lang="de-CH"/>
+          </a:p>
+        </p:txBody>
+      </p:sp>
+    </p:spTree>
+    <p:extLst>
+      <p:ext uri="{BB962C8B-B14F-4D97-AF65-F5344CB8AC3E}">
+        <p14:creationId xmlns:p14="http://schemas.microsoft.com/office/powerpoint/2010/main" val="935589963"/>
+      </p:ext>
+    </p:extLst>
+  </p:cSld>
+  <p:clrMapOvr>
+    <a:masterClrMapping/>
+  </p:clrMapOvr>
+</p:notes>
+</file>
+
+<file path=ppt/notesSlides/notesSlide23.xml><?xml version="1.0" encoding="utf-8"?>
+<p:notes xmlns:a="http://schemas.openxmlformats.org/drawingml/2006/main" xmlns:r="http://schemas.openxmlformats.org/officeDocument/2006/relationships" xmlns:p="http://schemas.openxmlformats.org/presentationml/2006/main">
+  <p:cSld>
+    <p:spTree>
+      <p:nvGrpSpPr>
+        <p:cNvPr id="1" name=""/>
+        <p:cNvGrpSpPr/>
+        <p:nvPr/>
+      </p:nvGrpSpPr>
+      <p:grpSpPr>
+        <a:xfrm>
+          <a:off x="0" y="0"/>
+          <a:ext cx="0" cy="0"/>
+          <a:chOff x="0" y="0"/>
+          <a:chExt cx="0" cy="0"/>
+        </a:xfrm>
+      </p:grpSpPr>
+      <p:sp>
+        <p:nvSpPr>
+          <p:cNvPr id="2" name="Slide Image Placeholder 1"/>
+          <p:cNvSpPr>
+            <a:spLocks noGrp="1" noRot="1" noChangeAspect="1"/>
+          </p:cNvSpPr>
+          <p:nvPr>
+            <p:ph type="sldImg"/>
+          </p:nvPr>
+        </p:nvSpPr>
+        <p:spPr/>
+      </p:sp>
+      <p:sp>
+        <p:nvSpPr>
+          <p:cNvPr id="3" name="Notes Placeholder 2"/>
+          <p:cNvSpPr>
+            <a:spLocks noGrp="1"/>
+          </p:cNvSpPr>
+          <p:nvPr>
+            <p:ph type="body" idx="1"/>
+          </p:nvPr>
+        </p:nvSpPr>
+        <p:spPr/>
+        <p:txBody>
+          <a:bodyPr/>
+          <a:lstStyle/>
+          <a:p>
+            <a:endParaRPr lang="fr-CH" dirty="0"/>
+          </a:p>
+        </p:txBody>
+      </p:sp>
+      <p:sp>
+        <p:nvSpPr>
+          <p:cNvPr id="4" name="Slide Number Placeholder 3"/>
+          <p:cNvSpPr>
+            <a:spLocks noGrp="1"/>
+          </p:cNvSpPr>
+          <p:nvPr>
+            <p:ph type="sldNum" sz="quarter" idx="5"/>
+          </p:nvPr>
+        </p:nvSpPr>
+        <p:spPr/>
+        <p:txBody>
+          <a:bodyPr/>
+          <a:lstStyle/>
+          <a:p>
+            <a:fld id="{DF285FF1-5C27-4ACA-95C0-28AC7E173261}" type="slidenum">
+              <a:rPr lang="de-CH" smtClean="0"/>
+              <a:t>23</a:t>
+            </a:fld>
+            <a:endParaRPr lang="de-CH"/>
+          </a:p>
+        </p:txBody>
+      </p:sp>
+    </p:spTree>
+    <p:extLst>
+      <p:ext uri="{BB962C8B-B14F-4D97-AF65-F5344CB8AC3E}">
+        <p14:creationId xmlns:p14="http://schemas.microsoft.com/office/powerpoint/2010/main" val="899949225"/>
+      </p:ext>
+    </p:extLst>
+  </p:cSld>
+  <p:clrMapOvr>
+    <a:masterClrMapping/>
+  </p:clrMapOvr>
+</p:notes>
+</file>
+
+<file path=ppt/notesSlides/notesSlide24.xml><?xml version="1.0" encoding="utf-8"?>
+<p:notes xmlns:a="http://schemas.openxmlformats.org/drawingml/2006/main" xmlns:r="http://schemas.openxmlformats.org/officeDocument/2006/relationships" xmlns:p="http://schemas.openxmlformats.org/presentationml/2006/main">
+  <p:cSld>
+    <p:spTree>
+      <p:nvGrpSpPr>
+        <p:cNvPr id="1" name=""/>
+        <p:cNvGrpSpPr/>
+        <p:nvPr/>
+      </p:nvGrpSpPr>
+      <p:grpSpPr>
+        <a:xfrm>
+          <a:off x="0" y="0"/>
+          <a:ext cx="0" cy="0"/>
+          <a:chOff x="0" y="0"/>
+          <a:chExt cx="0" cy="0"/>
+        </a:xfrm>
+      </p:grpSpPr>
+      <p:sp>
+        <p:nvSpPr>
+          <p:cNvPr id="2" name="Slide Image Placeholder 1"/>
+          <p:cNvSpPr>
+            <a:spLocks noGrp="1" noRot="1" noChangeAspect="1"/>
+          </p:cNvSpPr>
+          <p:nvPr>
+            <p:ph type="sldImg"/>
+          </p:nvPr>
+        </p:nvSpPr>
+        <p:spPr/>
+      </p:sp>
+      <p:sp>
+        <p:nvSpPr>
+          <p:cNvPr id="3" name="Notes Placeholder 2"/>
+          <p:cNvSpPr>
+            <a:spLocks noGrp="1"/>
+          </p:cNvSpPr>
+          <p:nvPr>
+            <p:ph type="body" idx="1"/>
+          </p:nvPr>
+        </p:nvSpPr>
+        <p:spPr/>
+        <p:txBody>
+          <a:bodyPr/>
+          <a:lstStyle/>
+          <a:p>
+            <a:endParaRPr lang="fr-CH" dirty="0"/>
+          </a:p>
+        </p:txBody>
+      </p:sp>
+      <p:sp>
+        <p:nvSpPr>
+          <p:cNvPr id="4" name="Slide Number Placeholder 3"/>
+          <p:cNvSpPr>
+            <a:spLocks noGrp="1"/>
+          </p:cNvSpPr>
+          <p:nvPr>
+            <p:ph type="sldNum" sz="quarter" idx="5"/>
+          </p:nvPr>
+        </p:nvSpPr>
+        <p:spPr/>
+        <p:txBody>
+          <a:bodyPr/>
+          <a:lstStyle/>
+          <a:p>
+            <a:fld id="{DF285FF1-5C27-4ACA-95C0-28AC7E173261}" type="slidenum">
+              <a:rPr lang="de-CH" smtClean="0"/>
+              <a:t>24</a:t>
+            </a:fld>
+            <a:endParaRPr lang="de-CH"/>
+          </a:p>
+        </p:txBody>
+      </p:sp>
+    </p:spTree>
+    <p:extLst>
+      <p:ext uri="{BB962C8B-B14F-4D97-AF65-F5344CB8AC3E}">
+        <p14:creationId xmlns:p14="http://schemas.microsoft.com/office/powerpoint/2010/main" val="1921355474"/>
+      </p:ext>
+    </p:extLst>
+  </p:cSld>
+  <p:clrMapOvr>
+    <a:masterClrMapping/>
+  </p:clrMapOvr>
+</p:notes>
+</file>
+
+<file path=ppt/notesSlides/notesSlide25.xml><?xml version="1.0" encoding="utf-8"?>
+<p:notes xmlns:a="http://schemas.openxmlformats.org/drawingml/2006/main" xmlns:r="http://schemas.openxmlformats.org/officeDocument/2006/relationships" xmlns:p="http://schemas.openxmlformats.org/presentationml/2006/main">
+  <p:cSld>
+    <p:spTree>
+      <p:nvGrpSpPr>
+        <p:cNvPr id="1" name=""/>
+        <p:cNvGrpSpPr/>
+        <p:nvPr/>
+      </p:nvGrpSpPr>
+      <p:grpSpPr>
+        <a:xfrm>
+          <a:off x="0" y="0"/>
+          <a:ext cx="0" cy="0"/>
+          <a:chOff x="0" y="0"/>
+          <a:chExt cx="0" cy="0"/>
+        </a:xfrm>
+      </p:grpSpPr>
+      <p:sp>
+        <p:nvSpPr>
+          <p:cNvPr id="2" name="Slide Image Placeholder 1"/>
+          <p:cNvSpPr>
+            <a:spLocks noGrp="1" noRot="1" noChangeAspect="1"/>
+          </p:cNvSpPr>
+          <p:nvPr>
+            <p:ph type="sldImg"/>
+          </p:nvPr>
+        </p:nvSpPr>
+        <p:spPr/>
+      </p:sp>
+      <p:sp>
+        <p:nvSpPr>
+          <p:cNvPr id="3" name="Notes Placeholder 2"/>
+          <p:cNvSpPr>
+            <a:spLocks noGrp="1"/>
+          </p:cNvSpPr>
+          <p:nvPr>
+            <p:ph type="body" idx="1"/>
+          </p:nvPr>
+        </p:nvSpPr>
+        <p:spPr/>
+        <p:txBody>
+          <a:bodyPr/>
+          <a:lstStyle/>
+          <a:p>
+            <a:endParaRPr lang="fr-CH" dirty="0"/>
+          </a:p>
+        </p:txBody>
+      </p:sp>
+      <p:sp>
+        <p:nvSpPr>
+          <p:cNvPr id="4" name="Slide Number Placeholder 3"/>
+          <p:cNvSpPr>
+            <a:spLocks noGrp="1"/>
+          </p:cNvSpPr>
+          <p:nvPr>
+            <p:ph type="sldNum" sz="quarter" idx="5"/>
+          </p:nvPr>
+        </p:nvSpPr>
+        <p:spPr/>
+        <p:txBody>
+          <a:bodyPr/>
+          <a:lstStyle/>
+          <a:p>
+            <a:fld id="{DF285FF1-5C27-4ACA-95C0-28AC7E173261}" type="slidenum">
+              <a:rPr lang="de-CH" smtClean="0"/>
+              <a:t>25</a:t>
+            </a:fld>
+            <a:endParaRPr lang="de-CH"/>
+          </a:p>
+        </p:txBody>
+      </p:sp>
+    </p:spTree>
+    <p:extLst>
+      <p:ext uri="{BB962C8B-B14F-4D97-AF65-F5344CB8AC3E}">
+        <p14:creationId xmlns:p14="http://schemas.microsoft.com/office/powerpoint/2010/main" val="2603649714"/>
+      </p:ext>
+    </p:extLst>
+  </p:cSld>
+  <p:clrMapOvr>
+    <a:masterClrMapping/>
+  </p:clrMapOvr>
+</p:notes>
+</file>
+
+<file path=ppt/notesSlides/notesSlide26.xml><?xml version="1.0" encoding="utf-8"?>
+<p:notes xmlns:a="http://schemas.openxmlformats.org/drawingml/2006/main" xmlns:r="http://schemas.openxmlformats.org/officeDocument/2006/relationships" xmlns:p="http://schemas.openxmlformats.org/presentationml/2006/main">
+  <p:cSld>
+    <p:spTree>
+      <p:nvGrpSpPr>
+        <p:cNvPr id="1" name=""/>
+        <p:cNvGrpSpPr/>
+        <p:nvPr/>
+      </p:nvGrpSpPr>
+      <p:grpSpPr>
+        <a:xfrm>
+          <a:off x="0" y="0"/>
+          <a:ext cx="0" cy="0"/>
+          <a:chOff x="0" y="0"/>
+          <a:chExt cx="0" cy="0"/>
+        </a:xfrm>
+      </p:grpSpPr>
+      <p:sp>
+        <p:nvSpPr>
+          <p:cNvPr id="2" name="Slide Image Placeholder 1"/>
+          <p:cNvSpPr>
+            <a:spLocks noGrp="1" noRot="1" noChangeAspect="1"/>
+          </p:cNvSpPr>
+          <p:nvPr>
+            <p:ph type="sldImg"/>
+          </p:nvPr>
+        </p:nvSpPr>
+        <p:spPr/>
+      </p:sp>
+      <p:sp>
+        <p:nvSpPr>
+          <p:cNvPr id="3" name="Notes Placeholder 2"/>
+          <p:cNvSpPr>
+            <a:spLocks noGrp="1"/>
+          </p:cNvSpPr>
+          <p:nvPr>
+            <p:ph type="body" idx="1"/>
+          </p:nvPr>
+        </p:nvSpPr>
+        <p:spPr/>
+        <p:txBody>
+          <a:bodyPr/>
+          <a:lstStyle/>
+          <a:p>
+            <a:endParaRPr lang="fr-CH" dirty="0"/>
+          </a:p>
+        </p:txBody>
+      </p:sp>
+      <p:sp>
+        <p:nvSpPr>
+          <p:cNvPr id="4" name="Slide Number Placeholder 3"/>
+          <p:cNvSpPr>
+            <a:spLocks noGrp="1"/>
+          </p:cNvSpPr>
+          <p:nvPr>
+            <p:ph type="sldNum" sz="quarter" idx="5"/>
+          </p:nvPr>
+        </p:nvSpPr>
+        <p:spPr/>
+        <p:txBody>
+          <a:bodyPr/>
+          <a:lstStyle/>
+          <a:p>
+            <a:fld id="{DF285FF1-5C27-4ACA-95C0-28AC7E173261}" type="slidenum">
+              <a:rPr lang="de-CH" smtClean="0"/>
+              <a:t>26</a:t>
+            </a:fld>
+            <a:endParaRPr lang="de-CH"/>
+          </a:p>
+        </p:txBody>
+      </p:sp>
+    </p:spTree>
+    <p:extLst>
+      <p:ext uri="{BB962C8B-B14F-4D97-AF65-F5344CB8AC3E}">
+        <p14:creationId xmlns:p14="http://schemas.microsoft.com/office/powerpoint/2010/main" val="3912841170"/>
+      </p:ext>
+    </p:extLst>
+  </p:cSld>
+  <p:clrMapOvr>
+    <a:masterClrMapping/>
+  </p:clrMapOvr>
+</p:notes>
+</file>
+
+<file path=ppt/notesSlides/notesSlide27.xml><?xml version="1.0" encoding="utf-8"?>
+<p:notes xmlns:a="http://schemas.openxmlformats.org/drawingml/2006/main" xmlns:r="http://schemas.openxmlformats.org/officeDocument/2006/relationships" xmlns:p="http://schemas.openxmlformats.org/presentationml/2006/main">
+  <p:cSld>
+    <p:spTree>
+      <p:nvGrpSpPr>
+        <p:cNvPr id="1" name=""/>
+        <p:cNvGrpSpPr/>
+        <p:nvPr/>
+      </p:nvGrpSpPr>
+      <p:grpSpPr>
+        <a:xfrm>
+          <a:off x="0" y="0"/>
+          <a:ext cx="0" cy="0"/>
+          <a:chOff x="0" y="0"/>
+          <a:chExt cx="0" cy="0"/>
+        </a:xfrm>
+      </p:grpSpPr>
+      <p:sp>
+        <p:nvSpPr>
+          <p:cNvPr id="2" name="Slide Image Placeholder 1"/>
+          <p:cNvSpPr>
+            <a:spLocks noGrp="1" noRot="1" noChangeAspect="1"/>
+          </p:cNvSpPr>
+          <p:nvPr>
+            <p:ph type="sldImg"/>
+          </p:nvPr>
+        </p:nvSpPr>
+        <p:spPr/>
+      </p:sp>
+      <p:sp>
+        <p:nvSpPr>
+          <p:cNvPr id="3" name="Notes Placeholder 2"/>
+          <p:cNvSpPr>
+            <a:spLocks noGrp="1"/>
+          </p:cNvSpPr>
+          <p:nvPr>
+            <p:ph type="body" idx="1"/>
+          </p:nvPr>
+        </p:nvSpPr>
+        <p:spPr/>
+        <p:txBody>
+          <a:bodyPr/>
+          <a:lstStyle/>
+          <a:p>
+            <a:endParaRPr lang="fr-CH" dirty="0"/>
+          </a:p>
+        </p:txBody>
+      </p:sp>
+      <p:sp>
+        <p:nvSpPr>
+          <p:cNvPr id="4" name="Slide Number Placeholder 3"/>
+          <p:cNvSpPr>
+            <a:spLocks noGrp="1"/>
+          </p:cNvSpPr>
+          <p:nvPr>
+            <p:ph type="sldNum" sz="quarter" idx="5"/>
+          </p:nvPr>
+        </p:nvSpPr>
+        <p:spPr/>
+        <p:txBody>
+          <a:bodyPr/>
+          <a:lstStyle/>
+          <a:p>
+            <a:fld id="{DF285FF1-5C27-4ACA-95C0-28AC7E173261}" type="slidenum">
+              <a:rPr lang="de-CH" smtClean="0"/>
+              <a:t>27</a:t>
+            </a:fld>
+            <a:endParaRPr lang="de-CH"/>
+          </a:p>
+        </p:txBody>
+      </p:sp>
+    </p:spTree>
+    <p:extLst>
+      <p:ext uri="{BB962C8B-B14F-4D97-AF65-F5344CB8AC3E}">
+        <p14:creationId xmlns:p14="http://schemas.microsoft.com/office/powerpoint/2010/main" val="3644542397"/>
+      </p:ext>
+    </p:extLst>
+  </p:cSld>
+  <p:clrMapOvr>
+    <a:masterClrMapping/>
+  </p:clrMapOvr>
+</p:notes>
+</file>
+
+<file path=ppt/notesSlides/notesSlide28.xml><?xml version="1.0" encoding="utf-8"?>
+<p:notes xmlns:a="http://schemas.openxmlformats.org/drawingml/2006/main" xmlns:r="http://schemas.openxmlformats.org/officeDocument/2006/relationships" xmlns:p="http://schemas.openxmlformats.org/presentationml/2006/main">
+  <p:cSld>
+    <p:spTree>
+      <p:nvGrpSpPr>
+        <p:cNvPr id="1" name=""/>
+        <p:cNvGrpSpPr/>
+        <p:nvPr/>
+      </p:nvGrpSpPr>
+      <p:grpSpPr>
+        <a:xfrm>
+          <a:off x="0" y="0"/>
+          <a:ext cx="0" cy="0"/>
+          <a:chOff x="0" y="0"/>
+          <a:chExt cx="0" cy="0"/>
+        </a:xfrm>
+      </p:grpSpPr>
+      <p:sp>
+        <p:nvSpPr>
+          <p:cNvPr id="2" name="Slide Image Placeholder 1"/>
+          <p:cNvSpPr>
+            <a:spLocks noGrp="1" noRot="1" noChangeAspect="1"/>
+          </p:cNvSpPr>
+          <p:nvPr>
+            <p:ph type="sldImg"/>
+          </p:nvPr>
+        </p:nvSpPr>
+        <p:spPr/>
+      </p:sp>
+      <p:sp>
+        <p:nvSpPr>
+          <p:cNvPr id="3" name="Notes Placeholder 2"/>
+          <p:cNvSpPr>
+            <a:spLocks noGrp="1"/>
+          </p:cNvSpPr>
+          <p:nvPr>
+            <p:ph type="body" idx="1"/>
+          </p:nvPr>
+        </p:nvSpPr>
+        <p:spPr/>
+        <p:txBody>
+          <a:bodyPr/>
+          <a:lstStyle/>
+          <a:p>
+            <a:endParaRPr lang="fr-CH" dirty="0"/>
+          </a:p>
+        </p:txBody>
+      </p:sp>
+      <p:sp>
+        <p:nvSpPr>
+          <p:cNvPr id="4" name="Slide Number Placeholder 3"/>
+          <p:cNvSpPr>
+            <a:spLocks noGrp="1"/>
+          </p:cNvSpPr>
+          <p:nvPr>
+            <p:ph type="sldNum" sz="quarter" idx="5"/>
+          </p:nvPr>
+        </p:nvSpPr>
+        <p:spPr/>
+        <p:txBody>
+          <a:bodyPr/>
+          <a:lstStyle/>
+          <a:p>
+            <a:fld id="{DF285FF1-5C27-4ACA-95C0-28AC7E173261}" type="slidenum">
+              <a:rPr lang="de-CH" smtClean="0"/>
+              <a:t>28</a:t>
+            </a:fld>
+            <a:endParaRPr lang="de-CH"/>
+          </a:p>
+        </p:txBody>
+      </p:sp>
+    </p:spTree>
+    <p:extLst>
+      <p:ext uri="{BB962C8B-B14F-4D97-AF65-F5344CB8AC3E}">
+        <p14:creationId xmlns:p14="http://schemas.microsoft.com/office/powerpoint/2010/main" val="1465631980"/>
+      </p:ext>
+    </p:extLst>
+  </p:cSld>
+  <p:clrMapOvr>
+    <a:masterClrMapping/>
+  </p:clrMapOvr>
+</p:notes>
+</file>
+
+<file path=ppt/notesSlides/notesSlide29.xml><?xml version="1.0" encoding="utf-8"?>
+<p:notes xmlns:a="http://schemas.openxmlformats.org/drawingml/2006/main" xmlns:r="http://schemas.openxmlformats.org/officeDocument/2006/relationships" xmlns:p="http://schemas.openxmlformats.org/presentationml/2006/main">
+  <p:cSld>
+    <p:spTree>
+      <p:nvGrpSpPr>
+        <p:cNvPr id="1" name=""/>
+        <p:cNvGrpSpPr/>
+        <p:nvPr/>
+      </p:nvGrpSpPr>
+      <p:grpSpPr>
+        <a:xfrm>
+          <a:off x="0" y="0"/>
+          <a:ext cx="0" cy="0"/>
+          <a:chOff x="0" y="0"/>
+          <a:chExt cx="0" cy="0"/>
+        </a:xfrm>
+      </p:grpSpPr>
+      <p:sp>
+        <p:nvSpPr>
+          <p:cNvPr id="2" name="Slide Image Placeholder 1"/>
+          <p:cNvSpPr>
+            <a:spLocks noGrp="1" noRot="1" noChangeAspect="1"/>
+          </p:cNvSpPr>
+          <p:nvPr>
+            <p:ph type="sldImg"/>
+          </p:nvPr>
+        </p:nvSpPr>
+        <p:spPr/>
+      </p:sp>
+      <p:sp>
+        <p:nvSpPr>
+          <p:cNvPr id="3" name="Notes Placeholder 2"/>
+          <p:cNvSpPr>
+            <a:spLocks noGrp="1"/>
+          </p:cNvSpPr>
+          <p:nvPr>
+            <p:ph type="body" idx="1"/>
+          </p:nvPr>
+        </p:nvSpPr>
+        <p:spPr/>
+        <p:txBody>
+          <a:bodyPr/>
+          <a:lstStyle/>
+          <a:p>
+            <a:endParaRPr lang="fr-CH" dirty="0"/>
+          </a:p>
+        </p:txBody>
+      </p:sp>
+      <p:sp>
+        <p:nvSpPr>
+          <p:cNvPr id="4" name="Slide Number Placeholder 3"/>
+          <p:cNvSpPr>
+            <a:spLocks noGrp="1"/>
+          </p:cNvSpPr>
+          <p:nvPr>
+            <p:ph type="sldNum" sz="quarter" idx="5"/>
+          </p:nvPr>
+        </p:nvSpPr>
+        <p:spPr/>
+        <p:txBody>
+          <a:bodyPr/>
+          <a:lstStyle/>
+          <a:p>
+            <a:fld id="{DF285FF1-5C27-4ACA-95C0-28AC7E173261}" type="slidenum">
+              <a:rPr lang="de-CH" smtClean="0"/>
+              <a:t>29</a:t>
+            </a:fld>
+            <a:endParaRPr lang="de-CH"/>
+          </a:p>
+        </p:txBody>
+      </p:sp>
+    </p:spTree>
+    <p:extLst>
+      <p:ext uri="{BB962C8B-B14F-4D97-AF65-F5344CB8AC3E}">
+        <p14:creationId xmlns:p14="http://schemas.microsoft.com/office/powerpoint/2010/main" val="1183474764"/>
+      </p:ext>
+    </p:extLst>
+  </p:cSld>
+  <p:clrMapOvr>
+    <a:masterClrMapping/>
+  </p:clrMapOvr>
+</p:notes>
+</file>
+
 <file path=ppt/notesSlides/notesSlide3.xml><?xml version="1.0" encoding="utf-8"?>
 <p:notes xmlns:a="http://schemas.openxmlformats.org/drawingml/2006/main" xmlns:r="http://schemas.openxmlformats.org/officeDocument/2006/relationships" xmlns:p="http://schemas.openxmlformats.org/presentationml/2006/main">
   <p:cSld>
@@ -2267,6 +3033,90 @@
     <p:extLst>
       <p:ext uri="{BB962C8B-B14F-4D97-AF65-F5344CB8AC3E}">
         <p14:creationId xmlns:p14="http://schemas.microsoft.com/office/powerpoint/2010/main" val="473371043"/>
+      </p:ext>
+    </p:extLst>
+  </p:cSld>
+  <p:clrMapOvr>
+    <a:masterClrMapping/>
+  </p:clrMapOvr>
+</p:notes>
+</file>
+
+<file path=ppt/notesSlides/notesSlide30.xml><?xml version="1.0" encoding="utf-8"?>
+<p:notes xmlns:a="http://schemas.openxmlformats.org/drawingml/2006/main" xmlns:r="http://schemas.openxmlformats.org/officeDocument/2006/relationships" xmlns:p="http://schemas.openxmlformats.org/presentationml/2006/main">
+  <p:cSld>
+    <p:spTree>
+      <p:nvGrpSpPr>
+        <p:cNvPr id="1" name=""/>
+        <p:cNvGrpSpPr/>
+        <p:nvPr/>
+      </p:nvGrpSpPr>
+      <p:grpSpPr>
+        <a:xfrm>
+          <a:off x="0" y="0"/>
+          <a:ext cx="0" cy="0"/>
+          <a:chOff x="0" y="0"/>
+          <a:chExt cx="0" cy="0"/>
+        </a:xfrm>
+      </p:grpSpPr>
+      <p:sp>
+        <p:nvSpPr>
+          <p:cNvPr id="2" name="Slide Image Placeholder 1"/>
+          <p:cNvSpPr>
+            <a:spLocks noGrp="1" noRot="1" noChangeAspect="1"/>
+          </p:cNvSpPr>
+          <p:nvPr>
+            <p:ph type="sldImg"/>
+          </p:nvPr>
+        </p:nvSpPr>
+        <p:spPr/>
+      </p:sp>
+      <p:sp>
+        <p:nvSpPr>
+          <p:cNvPr id="3" name="Notes Placeholder 2"/>
+          <p:cNvSpPr>
+            <a:spLocks noGrp="1"/>
+          </p:cNvSpPr>
+          <p:nvPr>
+            <p:ph type="body" idx="1"/>
+          </p:nvPr>
+        </p:nvSpPr>
+        <p:spPr/>
+        <p:txBody>
+          <a:bodyPr/>
+          <a:lstStyle/>
+          <a:p>
+            <a:endParaRPr lang="fr-CH" dirty="0"/>
+          </a:p>
+        </p:txBody>
+      </p:sp>
+      <p:sp>
+        <p:nvSpPr>
+          <p:cNvPr id="4" name="Slide Number Placeholder 3"/>
+          <p:cNvSpPr>
+            <a:spLocks noGrp="1"/>
+          </p:cNvSpPr>
+          <p:nvPr>
+            <p:ph type="sldNum" sz="quarter" idx="5"/>
+          </p:nvPr>
+        </p:nvSpPr>
+        <p:spPr/>
+        <p:txBody>
+          <a:bodyPr/>
+          <a:lstStyle/>
+          <a:p>
+            <a:fld id="{DF285FF1-5C27-4ACA-95C0-28AC7E173261}" type="slidenum">
+              <a:rPr lang="de-CH" smtClean="0"/>
+              <a:t>30</a:t>
+            </a:fld>
+            <a:endParaRPr lang="de-CH"/>
+          </a:p>
+        </p:txBody>
+      </p:sp>
+    </p:spTree>
+    <p:extLst>
+      <p:ext uri="{BB962C8B-B14F-4D97-AF65-F5344CB8AC3E}">
+        <p14:creationId xmlns:p14="http://schemas.microsoft.com/office/powerpoint/2010/main" val="1068562420"/>
       </p:ext>
     </p:extLst>
   </p:cSld>
@@ -2975,7 +3825,7 @@
           <a:p>
             <a:fld id="{35E808AD-3F98-4F59-A4F4-09C7BE2D0E9D}" type="datetimeFigureOut">
               <a:rPr lang="fr-FR" smtClean="0"/>
-              <a:t>09/01/2025</a:t>
+              <a:t>22/04/2025</a:t>
             </a:fld>
             <a:endParaRPr lang="fr-FR"/>
           </a:p>
@@ -3029,7 +3879,7 @@
           <a:p>
             <a:fld id="{0811643B-12A8-4CF8-B40F-8AEF532B986D}" type="slidenum">
               <a:rPr lang="fr-FR" smtClean="0"/>
-              <a:t>‹N°›</a:t>
+              <a:t>‹#›</a:t>
             </a:fld>
             <a:endParaRPr lang="fr-FR"/>
           </a:p>
@@ -3173,7 +4023,7 @@
           <a:p>
             <a:fld id="{35E808AD-3F98-4F59-A4F4-09C7BE2D0E9D}" type="datetimeFigureOut">
               <a:rPr lang="fr-FR" smtClean="0"/>
-              <a:t>09/01/2025</a:t>
+              <a:t>22/04/2025</a:t>
             </a:fld>
             <a:endParaRPr lang="fr-FR"/>
           </a:p>
@@ -3227,7 +4077,7 @@
           <a:p>
             <a:fld id="{0811643B-12A8-4CF8-B40F-8AEF532B986D}" type="slidenum">
               <a:rPr lang="fr-FR" smtClean="0"/>
-              <a:t>‹N°›</a:t>
+              <a:t>‹#›</a:t>
             </a:fld>
             <a:endParaRPr lang="fr-FR"/>
           </a:p>
@@ -3381,7 +4231,7 @@
           <a:p>
             <a:fld id="{35E808AD-3F98-4F59-A4F4-09C7BE2D0E9D}" type="datetimeFigureOut">
               <a:rPr lang="fr-FR" smtClean="0"/>
-              <a:t>09/01/2025</a:t>
+              <a:t>22/04/2025</a:t>
             </a:fld>
             <a:endParaRPr lang="fr-FR"/>
           </a:p>
@@ -3435,7 +4285,7 @@
           <a:p>
             <a:fld id="{0811643B-12A8-4CF8-B40F-8AEF532B986D}" type="slidenum">
               <a:rPr lang="fr-FR" smtClean="0"/>
-              <a:t>‹N°›</a:t>
+              <a:t>‹#›</a:t>
             </a:fld>
             <a:endParaRPr lang="fr-FR"/>
           </a:p>
@@ -3579,7 +4429,7 @@
           <a:p>
             <a:fld id="{35E808AD-3F98-4F59-A4F4-09C7BE2D0E9D}" type="datetimeFigureOut">
               <a:rPr lang="fr-FR" smtClean="0"/>
-              <a:t>09/01/2025</a:t>
+              <a:t>22/04/2025</a:t>
             </a:fld>
             <a:endParaRPr lang="fr-FR"/>
           </a:p>
@@ -3633,7 +4483,7 @@
           <a:p>
             <a:fld id="{0811643B-12A8-4CF8-B40F-8AEF532B986D}" type="slidenum">
               <a:rPr lang="fr-FR" smtClean="0"/>
-              <a:t>‹N°›</a:t>
+              <a:t>‹#›</a:t>
             </a:fld>
             <a:endParaRPr lang="fr-FR"/>
           </a:p>
@@ -3854,7 +4704,7 @@
           <a:p>
             <a:fld id="{35E808AD-3F98-4F59-A4F4-09C7BE2D0E9D}" type="datetimeFigureOut">
               <a:rPr lang="fr-FR" smtClean="0"/>
-              <a:t>09/01/2025</a:t>
+              <a:t>22/04/2025</a:t>
             </a:fld>
             <a:endParaRPr lang="fr-FR"/>
           </a:p>
@@ -3908,7 +4758,7 @@
           <a:p>
             <a:fld id="{0811643B-12A8-4CF8-B40F-8AEF532B986D}" type="slidenum">
               <a:rPr lang="fr-FR" smtClean="0"/>
-              <a:t>‹N°›</a:t>
+              <a:t>‹#›</a:t>
             </a:fld>
             <a:endParaRPr lang="fr-FR"/>
           </a:p>
@@ -4119,7 +4969,7 @@
           <a:p>
             <a:fld id="{35E808AD-3F98-4F59-A4F4-09C7BE2D0E9D}" type="datetimeFigureOut">
               <a:rPr lang="fr-FR" smtClean="0"/>
-              <a:t>09/01/2025</a:t>
+              <a:t>22/04/2025</a:t>
             </a:fld>
             <a:endParaRPr lang="fr-FR"/>
           </a:p>
@@ -4173,7 +5023,7 @@
           <a:p>
             <a:fld id="{0811643B-12A8-4CF8-B40F-8AEF532B986D}" type="slidenum">
               <a:rPr lang="fr-FR" smtClean="0"/>
-              <a:t>‹N°›</a:t>
+              <a:t>‹#›</a:t>
             </a:fld>
             <a:endParaRPr lang="fr-FR"/>
           </a:p>
@@ -4531,7 +5381,7 @@
           <a:p>
             <a:fld id="{35E808AD-3F98-4F59-A4F4-09C7BE2D0E9D}" type="datetimeFigureOut">
               <a:rPr lang="fr-FR" smtClean="0"/>
-              <a:t>09/01/2025</a:t>
+              <a:t>22/04/2025</a:t>
             </a:fld>
             <a:endParaRPr lang="fr-FR"/>
           </a:p>
@@ -4585,7 +5435,7 @@
           <a:p>
             <a:fld id="{0811643B-12A8-4CF8-B40F-8AEF532B986D}" type="slidenum">
               <a:rPr lang="fr-FR" smtClean="0"/>
-              <a:t>‹N°›</a:t>
+              <a:t>‹#›</a:t>
             </a:fld>
             <a:endParaRPr lang="fr-FR"/>
           </a:p>
@@ -4672,7 +5522,7 @@
           <a:p>
             <a:fld id="{35E808AD-3F98-4F59-A4F4-09C7BE2D0E9D}" type="datetimeFigureOut">
               <a:rPr lang="fr-FR" smtClean="0"/>
-              <a:t>09/01/2025</a:t>
+              <a:t>22/04/2025</a:t>
             </a:fld>
             <a:endParaRPr lang="fr-FR"/>
           </a:p>
@@ -4726,7 +5576,7 @@
           <a:p>
             <a:fld id="{0811643B-12A8-4CF8-B40F-8AEF532B986D}" type="slidenum">
               <a:rPr lang="fr-FR" smtClean="0"/>
-              <a:t>‹N°›</a:t>
+              <a:t>‹#›</a:t>
             </a:fld>
             <a:endParaRPr lang="fr-FR"/>
           </a:p>
@@ -4785,7 +5635,7 @@
           <a:p>
             <a:fld id="{35E808AD-3F98-4F59-A4F4-09C7BE2D0E9D}" type="datetimeFigureOut">
               <a:rPr lang="fr-FR" smtClean="0"/>
-              <a:t>09/01/2025</a:t>
+              <a:t>22/04/2025</a:t>
             </a:fld>
             <a:endParaRPr lang="fr-FR"/>
           </a:p>
@@ -4839,7 +5689,7 @@
           <a:p>
             <a:fld id="{0811643B-12A8-4CF8-B40F-8AEF532B986D}" type="slidenum">
               <a:rPr lang="fr-FR" smtClean="0"/>
-              <a:t>‹N°›</a:t>
+              <a:t>‹#›</a:t>
             </a:fld>
             <a:endParaRPr lang="fr-FR"/>
           </a:p>
@@ -5096,7 +5946,7 @@
           <a:p>
             <a:fld id="{35E808AD-3F98-4F59-A4F4-09C7BE2D0E9D}" type="datetimeFigureOut">
               <a:rPr lang="fr-FR" smtClean="0"/>
-              <a:t>09/01/2025</a:t>
+              <a:t>22/04/2025</a:t>
             </a:fld>
             <a:endParaRPr lang="fr-FR"/>
           </a:p>
@@ -5150,7 +6000,7 @@
           <a:p>
             <a:fld id="{0811643B-12A8-4CF8-B40F-8AEF532B986D}" type="slidenum">
               <a:rPr lang="fr-FR" smtClean="0"/>
-              <a:t>‹N°›</a:t>
+              <a:t>‹#›</a:t>
             </a:fld>
             <a:endParaRPr lang="fr-FR"/>
           </a:p>
@@ -5384,7 +6234,7 @@
           <a:p>
             <a:fld id="{35E808AD-3F98-4F59-A4F4-09C7BE2D0E9D}" type="datetimeFigureOut">
               <a:rPr lang="fr-FR" smtClean="0"/>
-              <a:t>09/01/2025</a:t>
+              <a:t>22/04/2025</a:t>
             </a:fld>
             <a:endParaRPr lang="fr-FR"/>
           </a:p>
@@ -5438,7 +6288,7 @@
           <a:p>
             <a:fld id="{0811643B-12A8-4CF8-B40F-8AEF532B986D}" type="slidenum">
               <a:rPr lang="fr-FR" smtClean="0"/>
-              <a:t>‹N°›</a:t>
+              <a:t>‹#›</a:t>
             </a:fld>
             <a:endParaRPr lang="fr-FR"/>
           </a:p>
@@ -5625,7 +6475,7 @@
           <a:p>
             <a:fld id="{35E808AD-3F98-4F59-A4F4-09C7BE2D0E9D}" type="datetimeFigureOut">
               <a:rPr lang="fr-FR" smtClean="0"/>
-              <a:t>09/01/2025</a:t>
+              <a:t>22/04/2025</a:t>
             </a:fld>
             <a:endParaRPr lang="fr-FR"/>
           </a:p>
@@ -5715,7 +6565,7 @@
           <a:p>
             <a:fld id="{0811643B-12A8-4CF8-B40F-8AEF532B986D}" type="slidenum">
               <a:rPr lang="fr-FR" smtClean="0"/>
-              <a:t>‹N°›</a:t>
+              <a:t>‹#›</a:t>
             </a:fld>
             <a:endParaRPr lang="fr-FR"/>
           </a:p>
@@ -10286,7 +11136,7 @@
 </p:sld>
 </file>
 
-<file path=ppt/slides/slide3.xml><?xml version="1.0" encoding="utf-8"?>
+<file path=ppt/slides/slide21.xml><?xml version="1.0" encoding="utf-8"?>
 <p:sld xmlns:a="http://schemas.openxmlformats.org/drawingml/2006/main" xmlns:r="http://schemas.openxmlformats.org/officeDocument/2006/relationships" xmlns:p="http://schemas.openxmlformats.org/presentationml/2006/main">
   <p:cSld>
     <p:spTree>
@@ -10354,6 +11204,1338 @@
               <a:rPr lang="en-US" sz="4000" dirty="0">
                 <a:cs typeface="Courier New" panose="02070309020205020404" pitchFamily="49" charset="0"/>
               </a:rPr>
+              <a:t>Secondary (direct) cause</a:t>
+            </a:r>
+            <a:endParaRPr lang="de-CH" sz="4000" dirty="0">
+              <a:cs typeface="Courier New" panose="02070309020205020404" pitchFamily="49" charset="0"/>
+            </a:endParaRPr>
+          </a:p>
+        </p:txBody>
+      </p:sp>
+      <p:sp>
+        <p:nvSpPr>
+          <p:cNvPr id="8" name="Slide Number Placeholder 7">
+            <a:extLst>
+              <a:ext uri="{FF2B5EF4-FFF2-40B4-BE49-F238E27FC236}">
+                <a16:creationId xmlns:a16="http://schemas.microsoft.com/office/drawing/2014/main" id="{D48339F2-FB24-BC3A-C4E8-BEA71177B1FD}"/>
+              </a:ext>
+            </a:extLst>
+          </p:cNvPr>
+          <p:cNvSpPr>
+            <a:spLocks noGrp="1"/>
+          </p:cNvSpPr>
+          <p:nvPr>
+            <p:ph type="sldNum" sz="quarter" idx="12"/>
+          </p:nvPr>
+        </p:nvSpPr>
+        <p:spPr/>
+        <p:txBody>
+          <a:bodyPr/>
+          <a:lstStyle/>
+          <a:p>
+            <a:fld id="{5368CAA0-23FB-4232-908B-CB576EB202C9}" type="slidenum">
+              <a:rPr lang="de-CH" smtClean="0"/>
+              <a:t>21</a:t>
+            </a:fld>
+            <a:endParaRPr lang="de-CH"/>
+          </a:p>
+        </p:txBody>
+      </p:sp>
+      <p:pic>
+        <p:nvPicPr>
+          <p:cNvPr id="15" name="Picture 14">
+            <a:extLst>
+              <a:ext uri="{FF2B5EF4-FFF2-40B4-BE49-F238E27FC236}">
+                <a16:creationId xmlns:a16="http://schemas.microsoft.com/office/drawing/2014/main" id="{526003F1-8E4C-9783-28BA-91E9A1B9F2E8}"/>
+              </a:ext>
+            </a:extLst>
+          </p:cNvPr>
+          <p:cNvPicPr>
+            <a:picLocks noChangeAspect="1"/>
+          </p:cNvPicPr>
+          <p:nvPr/>
+        </p:nvPicPr>
+        <p:blipFill>
+          <a:blip r:embed="rId3"/>
+          <a:stretch>
+            <a:fillRect/>
+          </a:stretch>
+        </p:blipFill>
+        <p:spPr>
+          <a:xfrm>
+            <a:off x="3074949" y="1268064"/>
+            <a:ext cx="6683297" cy="5270848"/>
+          </a:xfrm>
+          <a:prstGeom prst="rect">
+            <a:avLst/>
+          </a:prstGeom>
+        </p:spPr>
+      </p:pic>
+    </p:spTree>
+    <p:extLst>
+      <p:ext uri="{BB962C8B-B14F-4D97-AF65-F5344CB8AC3E}">
+        <p14:creationId xmlns:p14="http://schemas.microsoft.com/office/powerpoint/2010/main" val="625524706"/>
+      </p:ext>
+    </p:extLst>
+  </p:cSld>
+  <p:clrMapOvr>
+    <a:masterClrMapping/>
+  </p:clrMapOvr>
+</p:sld>
+</file>
+
+<file path=ppt/slides/slide22.xml><?xml version="1.0" encoding="utf-8"?>
+<p:sld xmlns:a="http://schemas.openxmlformats.org/drawingml/2006/main" xmlns:r="http://schemas.openxmlformats.org/officeDocument/2006/relationships" xmlns:p="http://schemas.openxmlformats.org/presentationml/2006/main">
+  <p:cSld>
+    <p:spTree>
+      <p:nvGrpSpPr>
+        <p:cNvPr id="1" name=""/>
+        <p:cNvGrpSpPr/>
+        <p:nvPr/>
+      </p:nvGrpSpPr>
+      <p:grpSpPr>
+        <a:xfrm>
+          <a:off x="0" y="0"/>
+          <a:ext cx="0" cy="0"/>
+          <a:chOff x="0" y="0"/>
+          <a:chExt cx="0" cy="0"/>
+        </a:xfrm>
+      </p:grpSpPr>
+      <p:sp>
+        <p:nvSpPr>
+          <p:cNvPr id="4" name="Rectangle 3">
+            <a:extLst>
+              <a:ext uri="{FF2B5EF4-FFF2-40B4-BE49-F238E27FC236}">
+                <a16:creationId xmlns:a16="http://schemas.microsoft.com/office/drawing/2014/main" id="{84DE0727-2AD0-60D0-4C5F-5A7C2346BAEF}"/>
+              </a:ext>
+            </a:extLst>
+          </p:cNvPr>
+          <p:cNvSpPr/>
+          <p:nvPr/>
+        </p:nvSpPr>
+        <p:spPr>
+          <a:xfrm>
+            <a:off x="0" y="-79377"/>
+            <a:ext cx="12192000" cy="1164879"/>
+          </a:xfrm>
+          <a:prstGeom prst="rect">
+            <a:avLst/>
+          </a:prstGeom>
+          <a:solidFill>
+            <a:srgbClr val="6AB7C6"/>
+          </a:solidFill>
+          <a:ln>
+            <a:noFill/>
+          </a:ln>
+        </p:spPr>
+        <p:style>
+          <a:lnRef idx="2">
+            <a:schemeClr val="accent1">
+              <a:shade val="50000"/>
+            </a:schemeClr>
+          </a:lnRef>
+          <a:fillRef idx="1">
+            <a:schemeClr val="accent1"/>
+          </a:fillRef>
+          <a:effectRef idx="0">
+            <a:schemeClr val="accent1"/>
+          </a:effectRef>
+          <a:fontRef idx="minor">
+            <a:schemeClr val="lt1"/>
+          </a:fontRef>
+        </p:style>
+        <p:txBody>
+          <a:bodyPr lIns="576000" rtlCol="0" anchor="ctr"/>
+          <a:lstStyle/>
+          <a:p>
+            <a:r>
+              <a:rPr lang="en-US" sz="4000" dirty="0">
+                <a:cs typeface="Courier New" panose="02070309020205020404" pitchFamily="49" charset="0"/>
+              </a:rPr>
+              <a:t>Secondary (direct) cause</a:t>
+            </a:r>
+            <a:endParaRPr lang="de-CH" sz="4000" dirty="0">
+              <a:cs typeface="Courier New" panose="02070309020205020404" pitchFamily="49" charset="0"/>
+            </a:endParaRPr>
+          </a:p>
+        </p:txBody>
+      </p:sp>
+      <p:sp>
+        <p:nvSpPr>
+          <p:cNvPr id="8" name="Slide Number Placeholder 7">
+            <a:extLst>
+              <a:ext uri="{FF2B5EF4-FFF2-40B4-BE49-F238E27FC236}">
+                <a16:creationId xmlns:a16="http://schemas.microsoft.com/office/drawing/2014/main" id="{D48339F2-FB24-BC3A-C4E8-BEA71177B1FD}"/>
+              </a:ext>
+            </a:extLst>
+          </p:cNvPr>
+          <p:cNvSpPr>
+            <a:spLocks noGrp="1"/>
+          </p:cNvSpPr>
+          <p:nvPr>
+            <p:ph type="sldNum" sz="quarter" idx="12"/>
+          </p:nvPr>
+        </p:nvSpPr>
+        <p:spPr/>
+        <p:txBody>
+          <a:bodyPr/>
+          <a:lstStyle/>
+          <a:p>
+            <a:fld id="{5368CAA0-23FB-4232-908B-CB576EB202C9}" type="slidenum">
+              <a:rPr lang="de-CH" smtClean="0"/>
+              <a:t>22</a:t>
+            </a:fld>
+            <a:endParaRPr lang="de-CH"/>
+          </a:p>
+        </p:txBody>
+      </p:sp>
+      <p:pic>
+        <p:nvPicPr>
+          <p:cNvPr id="3" name="Picture 2">
+            <a:extLst>
+              <a:ext uri="{FF2B5EF4-FFF2-40B4-BE49-F238E27FC236}">
+                <a16:creationId xmlns:a16="http://schemas.microsoft.com/office/drawing/2014/main" id="{20FDA616-BA6C-CC69-A5BA-557BF0FFBC65}"/>
+              </a:ext>
+            </a:extLst>
+          </p:cNvPr>
+          <p:cNvPicPr>
+            <a:picLocks noChangeAspect="1"/>
+          </p:cNvPicPr>
+          <p:nvPr/>
+        </p:nvPicPr>
+        <p:blipFill>
+          <a:blip r:embed="rId3"/>
+          <a:stretch>
+            <a:fillRect/>
+          </a:stretch>
+        </p:blipFill>
+        <p:spPr>
+          <a:xfrm>
+            <a:off x="2742213" y="1421024"/>
+            <a:ext cx="6707574" cy="5300451"/>
+          </a:xfrm>
+          <a:prstGeom prst="rect">
+            <a:avLst/>
+          </a:prstGeom>
+        </p:spPr>
+      </p:pic>
+    </p:spTree>
+    <p:extLst>
+      <p:ext uri="{BB962C8B-B14F-4D97-AF65-F5344CB8AC3E}">
+        <p14:creationId xmlns:p14="http://schemas.microsoft.com/office/powerpoint/2010/main" val="2430824312"/>
+      </p:ext>
+    </p:extLst>
+  </p:cSld>
+  <p:clrMapOvr>
+    <a:masterClrMapping/>
+  </p:clrMapOvr>
+</p:sld>
+</file>
+
+<file path=ppt/slides/slide23.xml><?xml version="1.0" encoding="utf-8"?>
+<p:sld xmlns:a="http://schemas.openxmlformats.org/drawingml/2006/main" xmlns:r="http://schemas.openxmlformats.org/officeDocument/2006/relationships" xmlns:p="http://schemas.openxmlformats.org/presentationml/2006/main">
+  <p:cSld>
+    <p:spTree>
+      <p:nvGrpSpPr>
+        <p:cNvPr id="1" name=""/>
+        <p:cNvGrpSpPr/>
+        <p:nvPr/>
+      </p:nvGrpSpPr>
+      <p:grpSpPr>
+        <a:xfrm>
+          <a:off x="0" y="0"/>
+          <a:ext cx="0" cy="0"/>
+          <a:chOff x="0" y="0"/>
+          <a:chExt cx="0" cy="0"/>
+        </a:xfrm>
+      </p:grpSpPr>
+      <p:sp>
+        <p:nvSpPr>
+          <p:cNvPr id="4" name="Rectangle 3">
+            <a:extLst>
+              <a:ext uri="{FF2B5EF4-FFF2-40B4-BE49-F238E27FC236}">
+                <a16:creationId xmlns:a16="http://schemas.microsoft.com/office/drawing/2014/main" id="{84DE0727-2AD0-60D0-4C5F-5A7C2346BAEF}"/>
+              </a:ext>
+            </a:extLst>
+          </p:cNvPr>
+          <p:cNvSpPr/>
+          <p:nvPr/>
+        </p:nvSpPr>
+        <p:spPr>
+          <a:xfrm>
+            <a:off x="0" y="-79377"/>
+            <a:ext cx="12192000" cy="1164879"/>
+          </a:xfrm>
+          <a:prstGeom prst="rect">
+            <a:avLst/>
+          </a:prstGeom>
+          <a:solidFill>
+            <a:srgbClr val="6AB7C6"/>
+          </a:solidFill>
+          <a:ln>
+            <a:noFill/>
+          </a:ln>
+        </p:spPr>
+        <p:style>
+          <a:lnRef idx="2">
+            <a:schemeClr val="accent1">
+              <a:shade val="50000"/>
+            </a:schemeClr>
+          </a:lnRef>
+          <a:fillRef idx="1">
+            <a:schemeClr val="accent1"/>
+          </a:fillRef>
+          <a:effectRef idx="0">
+            <a:schemeClr val="accent1"/>
+          </a:effectRef>
+          <a:fontRef idx="minor">
+            <a:schemeClr val="lt1"/>
+          </a:fontRef>
+        </p:style>
+        <p:txBody>
+          <a:bodyPr lIns="576000" rtlCol="0" anchor="ctr"/>
+          <a:lstStyle/>
+          <a:p>
+            <a:r>
+              <a:rPr lang="en-US" sz="4000" dirty="0">
+                <a:cs typeface="Courier New" panose="02070309020205020404" pitchFamily="49" charset="0"/>
+              </a:rPr>
+              <a:t>Secondary (direct) cause, 70+</a:t>
+            </a:r>
+            <a:endParaRPr lang="de-CH" sz="4000" dirty="0">
+              <a:cs typeface="Courier New" panose="02070309020205020404" pitchFamily="49" charset="0"/>
+            </a:endParaRPr>
+          </a:p>
+        </p:txBody>
+      </p:sp>
+      <p:sp>
+        <p:nvSpPr>
+          <p:cNvPr id="8" name="Slide Number Placeholder 7">
+            <a:extLst>
+              <a:ext uri="{FF2B5EF4-FFF2-40B4-BE49-F238E27FC236}">
+                <a16:creationId xmlns:a16="http://schemas.microsoft.com/office/drawing/2014/main" id="{D48339F2-FB24-BC3A-C4E8-BEA71177B1FD}"/>
+              </a:ext>
+            </a:extLst>
+          </p:cNvPr>
+          <p:cNvSpPr>
+            <a:spLocks noGrp="1"/>
+          </p:cNvSpPr>
+          <p:nvPr>
+            <p:ph type="sldNum" sz="quarter" idx="12"/>
+          </p:nvPr>
+        </p:nvSpPr>
+        <p:spPr/>
+        <p:txBody>
+          <a:bodyPr/>
+          <a:lstStyle/>
+          <a:p>
+            <a:fld id="{5368CAA0-23FB-4232-908B-CB576EB202C9}" type="slidenum">
+              <a:rPr lang="de-CH" smtClean="0"/>
+              <a:t>23</a:t>
+            </a:fld>
+            <a:endParaRPr lang="de-CH"/>
+          </a:p>
+        </p:txBody>
+      </p:sp>
+      <p:pic>
+        <p:nvPicPr>
+          <p:cNvPr id="5" name="Picture 4">
+            <a:extLst>
+              <a:ext uri="{FF2B5EF4-FFF2-40B4-BE49-F238E27FC236}">
+                <a16:creationId xmlns:a16="http://schemas.microsoft.com/office/drawing/2014/main" id="{7445953A-331F-99BA-39CA-AEF20838E028}"/>
+              </a:ext>
+            </a:extLst>
+          </p:cNvPr>
+          <p:cNvPicPr>
+            <a:picLocks noChangeAspect="1"/>
+          </p:cNvPicPr>
+          <p:nvPr/>
+        </p:nvPicPr>
+        <p:blipFill>
+          <a:blip r:embed="rId3"/>
+          <a:stretch>
+            <a:fillRect/>
+          </a:stretch>
+        </p:blipFill>
+        <p:spPr>
+          <a:xfrm>
+            <a:off x="2854712" y="1226671"/>
+            <a:ext cx="6806309" cy="5312241"/>
+          </a:xfrm>
+          <a:prstGeom prst="rect">
+            <a:avLst/>
+          </a:prstGeom>
+        </p:spPr>
+      </p:pic>
+    </p:spTree>
+    <p:extLst>
+      <p:ext uri="{BB962C8B-B14F-4D97-AF65-F5344CB8AC3E}">
+        <p14:creationId xmlns:p14="http://schemas.microsoft.com/office/powerpoint/2010/main" val="149745566"/>
+      </p:ext>
+    </p:extLst>
+  </p:cSld>
+  <p:clrMapOvr>
+    <a:masterClrMapping/>
+  </p:clrMapOvr>
+</p:sld>
+</file>
+
+<file path=ppt/slides/slide24.xml><?xml version="1.0" encoding="utf-8"?>
+<p:sld xmlns:a="http://schemas.openxmlformats.org/drawingml/2006/main" xmlns:r="http://schemas.openxmlformats.org/officeDocument/2006/relationships" xmlns:p="http://schemas.openxmlformats.org/presentationml/2006/main">
+  <p:cSld>
+    <p:spTree>
+      <p:nvGrpSpPr>
+        <p:cNvPr id="1" name=""/>
+        <p:cNvGrpSpPr/>
+        <p:nvPr/>
+      </p:nvGrpSpPr>
+      <p:grpSpPr>
+        <a:xfrm>
+          <a:off x="0" y="0"/>
+          <a:ext cx="0" cy="0"/>
+          <a:chOff x="0" y="0"/>
+          <a:chExt cx="0" cy="0"/>
+        </a:xfrm>
+      </p:grpSpPr>
+      <p:sp>
+        <p:nvSpPr>
+          <p:cNvPr id="4" name="Rectangle 3">
+            <a:extLst>
+              <a:ext uri="{FF2B5EF4-FFF2-40B4-BE49-F238E27FC236}">
+                <a16:creationId xmlns:a16="http://schemas.microsoft.com/office/drawing/2014/main" id="{84DE0727-2AD0-60D0-4C5F-5A7C2346BAEF}"/>
+              </a:ext>
+            </a:extLst>
+          </p:cNvPr>
+          <p:cNvSpPr/>
+          <p:nvPr/>
+        </p:nvSpPr>
+        <p:spPr>
+          <a:xfrm>
+            <a:off x="0" y="-79377"/>
+            <a:ext cx="12192000" cy="1164879"/>
+          </a:xfrm>
+          <a:prstGeom prst="rect">
+            <a:avLst/>
+          </a:prstGeom>
+          <a:solidFill>
+            <a:srgbClr val="6AB7C6"/>
+          </a:solidFill>
+          <a:ln>
+            <a:noFill/>
+          </a:ln>
+        </p:spPr>
+        <p:style>
+          <a:lnRef idx="2">
+            <a:schemeClr val="accent1">
+              <a:shade val="50000"/>
+            </a:schemeClr>
+          </a:lnRef>
+          <a:fillRef idx="1">
+            <a:schemeClr val="accent1"/>
+          </a:fillRef>
+          <a:effectRef idx="0">
+            <a:schemeClr val="accent1"/>
+          </a:effectRef>
+          <a:fontRef idx="minor">
+            <a:schemeClr val="lt1"/>
+          </a:fontRef>
+        </p:style>
+        <p:txBody>
+          <a:bodyPr lIns="576000" rtlCol="0" anchor="ctr"/>
+          <a:lstStyle/>
+          <a:p>
+            <a:r>
+              <a:rPr lang="en-US" sz="4000" dirty="0">
+                <a:cs typeface="Courier New" panose="02070309020205020404" pitchFamily="49" charset="0"/>
+              </a:rPr>
+              <a:t>Secondary (direct) cause, 70+</a:t>
+            </a:r>
+            <a:endParaRPr lang="de-CH" sz="4000" dirty="0">
+              <a:cs typeface="Courier New" panose="02070309020205020404" pitchFamily="49" charset="0"/>
+            </a:endParaRPr>
+          </a:p>
+        </p:txBody>
+      </p:sp>
+      <p:sp>
+        <p:nvSpPr>
+          <p:cNvPr id="8" name="Slide Number Placeholder 7">
+            <a:extLst>
+              <a:ext uri="{FF2B5EF4-FFF2-40B4-BE49-F238E27FC236}">
+                <a16:creationId xmlns:a16="http://schemas.microsoft.com/office/drawing/2014/main" id="{D48339F2-FB24-BC3A-C4E8-BEA71177B1FD}"/>
+              </a:ext>
+            </a:extLst>
+          </p:cNvPr>
+          <p:cNvSpPr>
+            <a:spLocks noGrp="1"/>
+          </p:cNvSpPr>
+          <p:nvPr>
+            <p:ph type="sldNum" sz="quarter" idx="12"/>
+          </p:nvPr>
+        </p:nvSpPr>
+        <p:spPr/>
+        <p:txBody>
+          <a:bodyPr/>
+          <a:lstStyle/>
+          <a:p>
+            <a:fld id="{5368CAA0-23FB-4232-908B-CB576EB202C9}" type="slidenum">
+              <a:rPr lang="de-CH" smtClean="0"/>
+              <a:t>24</a:t>
+            </a:fld>
+            <a:endParaRPr lang="de-CH"/>
+          </a:p>
+        </p:txBody>
+      </p:sp>
+      <p:pic>
+        <p:nvPicPr>
+          <p:cNvPr id="5" name="Picture 4">
+            <a:extLst>
+              <a:ext uri="{FF2B5EF4-FFF2-40B4-BE49-F238E27FC236}">
+                <a16:creationId xmlns:a16="http://schemas.microsoft.com/office/drawing/2014/main" id="{4F79205B-0A10-3622-7091-ED477C55416C}"/>
+              </a:ext>
+            </a:extLst>
+          </p:cNvPr>
+          <p:cNvPicPr>
+            <a:picLocks noChangeAspect="1"/>
+          </p:cNvPicPr>
+          <p:nvPr/>
+        </p:nvPicPr>
+        <p:blipFill>
+          <a:blip r:embed="rId3"/>
+          <a:stretch>
+            <a:fillRect/>
+          </a:stretch>
+        </p:blipFill>
+        <p:spPr>
+          <a:xfrm>
+            <a:off x="1908277" y="1388442"/>
+            <a:ext cx="6564325" cy="5150470"/>
+          </a:xfrm>
+          <a:prstGeom prst="rect">
+            <a:avLst/>
+          </a:prstGeom>
+        </p:spPr>
+      </p:pic>
+    </p:spTree>
+    <p:extLst>
+      <p:ext uri="{BB962C8B-B14F-4D97-AF65-F5344CB8AC3E}">
+        <p14:creationId xmlns:p14="http://schemas.microsoft.com/office/powerpoint/2010/main" val="3021388898"/>
+      </p:ext>
+    </p:extLst>
+  </p:cSld>
+  <p:clrMapOvr>
+    <a:masterClrMapping/>
+  </p:clrMapOvr>
+</p:sld>
+</file>
+
+<file path=ppt/slides/slide25.xml><?xml version="1.0" encoding="utf-8"?>
+<p:sld xmlns:a="http://schemas.openxmlformats.org/drawingml/2006/main" xmlns:r="http://schemas.openxmlformats.org/officeDocument/2006/relationships" xmlns:p="http://schemas.openxmlformats.org/presentationml/2006/main">
+  <p:cSld>
+    <p:spTree>
+      <p:nvGrpSpPr>
+        <p:cNvPr id="1" name=""/>
+        <p:cNvGrpSpPr/>
+        <p:nvPr/>
+      </p:nvGrpSpPr>
+      <p:grpSpPr>
+        <a:xfrm>
+          <a:off x="0" y="0"/>
+          <a:ext cx="0" cy="0"/>
+          <a:chOff x="0" y="0"/>
+          <a:chExt cx="0" cy="0"/>
+        </a:xfrm>
+      </p:grpSpPr>
+      <p:sp>
+        <p:nvSpPr>
+          <p:cNvPr id="4" name="Rectangle 3">
+            <a:extLst>
+              <a:ext uri="{FF2B5EF4-FFF2-40B4-BE49-F238E27FC236}">
+                <a16:creationId xmlns:a16="http://schemas.microsoft.com/office/drawing/2014/main" id="{84DE0727-2AD0-60D0-4C5F-5A7C2346BAEF}"/>
+              </a:ext>
+            </a:extLst>
+          </p:cNvPr>
+          <p:cNvSpPr/>
+          <p:nvPr/>
+        </p:nvSpPr>
+        <p:spPr>
+          <a:xfrm>
+            <a:off x="0" y="-79377"/>
+            <a:ext cx="12192000" cy="1164879"/>
+          </a:xfrm>
+          <a:prstGeom prst="rect">
+            <a:avLst/>
+          </a:prstGeom>
+          <a:solidFill>
+            <a:srgbClr val="6AB7C6"/>
+          </a:solidFill>
+          <a:ln>
+            <a:noFill/>
+          </a:ln>
+        </p:spPr>
+        <p:style>
+          <a:lnRef idx="2">
+            <a:schemeClr val="accent1">
+              <a:shade val="50000"/>
+            </a:schemeClr>
+          </a:lnRef>
+          <a:fillRef idx="1">
+            <a:schemeClr val="accent1"/>
+          </a:fillRef>
+          <a:effectRef idx="0">
+            <a:schemeClr val="accent1"/>
+          </a:effectRef>
+          <a:fontRef idx="minor">
+            <a:schemeClr val="lt1"/>
+          </a:fontRef>
+        </p:style>
+        <p:txBody>
+          <a:bodyPr lIns="576000" rtlCol="0" anchor="ctr"/>
+          <a:lstStyle/>
+          <a:p>
+            <a:r>
+              <a:rPr lang="en-US" sz="4000" dirty="0">
+                <a:cs typeface="Courier New" panose="02070309020205020404" pitchFamily="49" charset="0"/>
+              </a:rPr>
+              <a:t>Secondary (direct) cause</a:t>
+            </a:r>
+            <a:endParaRPr lang="de-CH" sz="4000" dirty="0">
+              <a:cs typeface="Courier New" panose="02070309020205020404" pitchFamily="49" charset="0"/>
+            </a:endParaRPr>
+          </a:p>
+        </p:txBody>
+      </p:sp>
+      <p:sp>
+        <p:nvSpPr>
+          <p:cNvPr id="8" name="Slide Number Placeholder 7">
+            <a:extLst>
+              <a:ext uri="{FF2B5EF4-FFF2-40B4-BE49-F238E27FC236}">
+                <a16:creationId xmlns:a16="http://schemas.microsoft.com/office/drawing/2014/main" id="{D48339F2-FB24-BC3A-C4E8-BEA71177B1FD}"/>
+              </a:ext>
+            </a:extLst>
+          </p:cNvPr>
+          <p:cNvSpPr>
+            <a:spLocks noGrp="1"/>
+          </p:cNvSpPr>
+          <p:nvPr>
+            <p:ph type="sldNum" sz="quarter" idx="12"/>
+          </p:nvPr>
+        </p:nvSpPr>
+        <p:spPr/>
+        <p:txBody>
+          <a:bodyPr/>
+          <a:lstStyle/>
+          <a:p>
+            <a:fld id="{5368CAA0-23FB-4232-908B-CB576EB202C9}" type="slidenum">
+              <a:rPr lang="de-CH" smtClean="0"/>
+              <a:t>25</a:t>
+            </a:fld>
+            <a:endParaRPr lang="de-CH"/>
+          </a:p>
+        </p:txBody>
+      </p:sp>
+      <p:pic>
+        <p:nvPicPr>
+          <p:cNvPr id="3" name="Picture 2">
+            <a:extLst>
+              <a:ext uri="{FF2B5EF4-FFF2-40B4-BE49-F238E27FC236}">
+                <a16:creationId xmlns:a16="http://schemas.microsoft.com/office/drawing/2014/main" id="{4170036C-C67A-35A6-57AA-5BE5CB3AE685}"/>
+              </a:ext>
+            </a:extLst>
+          </p:cNvPr>
+          <p:cNvPicPr>
+            <a:picLocks noChangeAspect="1"/>
+          </p:cNvPicPr>
+          <p:nvPr/>
+        </p:nvPicPr>
+        <p:blipFill>
+          <a:blip r:embed="rId3"/>
+          <a:stretch>
+            <a:fillRect/>
+          </a:stretch>
+        </p:blipFill>
+        <p:spPr>
+          <a:xfrm>
+            <a:off x="1796740" y="1181382"/>
+            <a:ext cx="6813860" cy="5357530"/>
+          </a:xfrm>
+          <a:prstGeom prst="rect">
+            <a:avLst/>
+          </a:prstGeom>
+        </p:spPr>
+      </p:pic>
+    </p:spTree>
+    <p:extLst>
+      <p:ext uri="{BB962C8B-B14F-4D97-AF65-F5344CB8AC3E}">
+        <p14:creationId xmlns:p14="http://schemas.microsoft.com/office/powerpoint/2010/main" val="996024478"/>
+      </p:ext>
+    </p:extLst>
+  </p:cSld>
+  <p:clrMapOvr>
+    <a:masterClrMapping/>
+  </p:clrMapOvr>
+</p:sld>
+</file>
+
+<file path=ppt/slides/slide26.xml><?xml version="1.0" encoding="utf-8"?>
+<p:sld xmlns:a="http://schemas.openxmlformats.org/drawingml/2006/main" xmlns:r="http://schemas.openxmlformats.org/officeDocument/2006/relationships" xmlns:p="http://schemas.openxmlformats.org/presentationml/2006/main">
+  <p:cSld>
+    <p:spTree>
+      <p:nvGrpSpPr>
+        <p:cNvPr id="1" name=""/>
+        <p:cNvGrpSpPr/>
+        <p:nvPr/>
+      </p:nvGrpSpPr>
+      <p:grpSpPr>
+        <a:xfrm>
+          <a:off x="0" y="0"/>
+          <a:ext cx="0" cy="0"/>
+          <a:chOff x="0" y="0"/>
+          <a:chExt cx="0" cy="0"/>
+        </a:xfrm>
+      </p:grpSpPr>
+      <p:sp>
+        <p:nvSpPr>
+          <p:cNvPr id="4" name="Rectangle 3">
+            <a:extLst>
+              <a:ext uri="{FF2B5EF4-FFF2-40B4-BE49-F238E27FC236}">
+                <a16:creationId xmlns:a16="http://schemas.microsoft.com/office/drawing/2014/main" id="{84DE0727-2AD0-60D0-4C5F-5A7C2346BAEF}"/>
+              </a:ext>
+            </a:extLst>
+          </p:cNvPr>
+          <p:cNvSpPr/>
+          <p:nvPr/>
+        </p:nvSpPr>
+        <p:spPr>
+          <a:xfrm>
+            <a:off x="0" y="-79377"/>
+            <a:ext cx="12192000" cy="1164879"/>
+          </a:xfrm>
+          <a:prstGeom prst="rect">
+            <a:avLst/>
+          </a:prstGeom>
+          <a:solidFill>
+            <a:srgbClr val="6AB7C6"/>
+          </a:solidFill>
+          <a:ln>
+            <a:noFill/>
+          </a:ln>
+        </p:spPr>
+        <p:style>
+          <a:lnRef idx="2">
+            <a:schemeClr val="accent1">
+              <a:shade val="50000"/>
+            </a:schemeClr>
+          </a:lnRef>
+          <a:fillRef idx="1">
+            <a:schemeClr val="accent1"/>
+          </a:fillRef>
+          <a:effectRef idx="0">
+            <a:schemeClr val="accent1"/>
+          </a:effectRef>
+          <a:fontRef idx="minor">
+            <a:schemeClr val="lt1"/>
+          </a:fontRef>
+        </p:style>
+        <p:txBody>
+          <a:bodyPr lIns="576000" rtlCol="0" anchor="ctr"/>
+          <a:lstStyle/>
+          <a:p>
+            <a:r>
+              <a:rPr lang="en-US" sz="4000" dirty="0">
+                <a:cs typeface="Courier New" panose="02070309020205020404" pitchFamily="49" charset="0"/>
+              </a:rPr>
+              <a:t>Secondary (direct) cause</a:t>
+            </a:r>
+            <a:endParaRPr lang="de-CH" sz="4000" dirty="0">
+              <a:cs typeface="Courier New" panose="02070309020205020404" pitchFamily="49" charset="0"/>
+            </a:endParaRPr>
+          </a:p>
+        </p:txBody>
+      </p:sp>
+      <p:sp>
+        <p:nvSpPr>
+          <p:cNvPr id="8" name="Slide Number Placeholder 7">
+            <a:extLst>
+              <a:ext uri="{FF2B5EF4-FFF2-40B4-BE49-F238E27FC236}">
+                <a16:creationId xmlns:a16="http://schemas.microsoft.com/office/drawing/2014/main" id="{D48339F2-FB24-BC3A-C4E8-BEA71177B1FD}"/>
+              </a:ext>
+            </a:extLst>
+          </p:cNvPr>
+          <p:cNvSpPr>
+            <a:spLocks noGrp="1"/>
+          </p:cNvSpPr>
+          <p:nvPr>
+            <p:ph type="sldNum" sz="quarter" idx="12"/>
+          </p:nvPr>
+        </p:nvSpPr>
+        <p:spPr/>
+        <p:txBody>
+          <a:bodyPr/>
+          <a:lstStyle/>
+          <a:p>
+            <a:fld id="{5368CAA0-23FB-4232-908B-CB576EB202C9}" type="slidenum">
+              <a:rPr lang="de-CH" smtClean="0"/>
+              <a:t>26</a:t>
+            </a:fld>
+            <a:endParaRPr lang="de-CH"/>
+          </a:p>
+        </p:txBody>
+      </p:sp>
+      <p:pic>
+        <p:nvPicPr>
+          <p:cNvPr id="5" name="Picture 4">
+            <a:extLst>
+              <a:ext uri="{FF2B5EF4-FFF2-40B4-BE49-F238E27FC236}">
+                <a16:creationId xmlns:a16="http://schemas.microsoft.com/office/drawing/2014/main" id="{3AAE7A6B-81B3-5431-0D5B-4F63C67D1459}"/>
+              </a:ext>
+            </a:extLst>
+          </p:cNvPr>
+          <p:cNvPicPr>
+            <a:picLocks noChangeAspect="1"/>
+          </p:cNvPicPr>
+          <p:nvPr/>
+        </p:nvPicPr>
+        <p:blipFill>
+          <a:blip r:embed="rId3"/>
+          <a:stretch>
+            <a:fillRect/>
+          </a:stretch>
+        </p:blipFill>
+        <p:spPr>
+          <a:xfrm>
+            <a:off x="1904906" y="1085502"/>
+            <a:ext cx="7174742" cy="5635973"/>
+          </a:xfrm>
+          <a:prstGeom prst="rect">
+            <a:avLst/>
+          </a:prstGeom>
+        </p:spPr>
+      </p:pic>
+    </p:spTree>
+    <p:extLst>
+      <p:ext uri="{BB962C8B-B14F-4D97-AF65-F5344CB8AC3E}">
+        <p14:creationId xmlns:p14="http://schemas.microsoft.com/office/powerpoint/2010/main" val="644763867"/>
+      </p:ext>
+    </p:extLst>
+  </p:cSld>
+  <p:clrMapOvr>
+    <a:masterClrMapping/>
+  </p:clrMapOvr>
+</p:sld>
+</file>
+
+<file path=ppt/slides/slide27.xml><?xml version="1.0" encoding="utf-8"?>
+<p:sld xmlns:a="http://schemas.openxmlformats.org/drawingml/2006/main" xmlns:r="http://schemas.openxmlformats.org/officeDocument/2006/relationships" xmlns:p="http://schemas.openxmlformats.org/presentationml/2006/main">
+  <p:cSld>
+    <p:spTree>
+      <p:nvGrpSpPr>
+        <p:cNvPr id="1" name=""/>
+        <p:cNvGrpSpPr/>
+        <p:nvPr/>
+      </p:nvGrpSpPr>
+      <p:grpSpPr>
+        <a:xfrm>
+          <a:off x="0" y="0"/>
+          <a:ext cx="0" cy="0"/>
+          <a:chOff x="0" y="0"/>
+          <a:chExt cx="0" cy="0"/>
+        </a:xfrm>
+      </p:grpSpPr>
+      <p:sp>
+        <p:nvSpPr>
+          <p:cNvPr id="4" name="Rectangle 3">
+            <a:extLst>
+              <a:ext uri="{FF2B5EF4-FFF2-40B4-BE49-F238E27FC236}">
+                <a16:creationId xmlns:a16="http://schemas.microsoft.com/office/drawing/2014/main" id="{84DE0727-2AD0-60D0-4C5F-5A7C2346BAEF}"/>
+              </a:ext>
+            </a:extLst>
+          </p:cNvPr>
+          <p:cNvSpPr/>
+          <p:nvPr/>
+        </p:nvSpPr>
+        <p:spPr>
+          <a:xfrm>
+            <a:off x="0" y="-79377"/>
+            <a:ext cx="12192000" cy="1164879"/>
+          </a:xfrm>
+          <a:prstGeom prst="rect">
+            <a:avLst/>
+          </a:prstGeom>
+          <a:solidFill>
+            <a:srgbClr val="6AB7C6"/>
+          </a:solidFill>
+          <a:ln>
+            <a:noFill/>
+          </a:ln>
+        </p:spPr>
+        <p:style>
+          <a:lnRef idx="2">
+            <a:schemeClr val="accent1">
+              <a:shade val="50000"/>
+            </a:schemeClr>
+          </a:lnRef>
+          <a:fillRef idx="1">
+            <a:schemeClr val="accent1"/>
+          </a:fillRef>
+          <a:effectRef idx="0">
+            <a:schemeClr val="accent1"/>
+          </a:effectRef>
+          <a:fontRef idx="minor">
+            <a:schemeClr val="lt1"/>
+          </a:fontRef>
+        </p:style>
+        <p:txBody>
+          <a:bodyPr lIns="576000" rtlCol="0" anchor="ctr"/>
+          <a:lstStyle/>
+          <a:p>
+            <a:r>
+              <a:rPr lang="en-US" sz="4000" dirty="0">
+                <a:cs typeface="Courier New" panose="02070309020205020404" pitchFamily="49" charset="0"/>
+              </a:rPr>
+              <a:t>Secondary (direct) cause, 70+</a:t>
+            </a:r>
+            <a:endParaRPr lang="de-CH" sz="4000" dirty="0">
+              <a:cs typeface="Courier New" panose="02070309020205020404" pitchFamily="49" charset="0"/>
+            </a:endParaRPr>
+          </a:p>
+        </p:txBody>
+      </p:sp>
+      <p:sp>
+        <p:nvSpPr>
+          <p:cNvPr id="8" name="Slide Number Placeholder 7">
+            <a:extLst>
+              <a:ext uri="{FF2B5EF4-FFF2-40B4-BE49-F238E27FC236}">
+                <a16:creationId xmlns:a16="http://schemas.microsoft.com/office/drawing/2014/main" id="{D48339F2-FB24-BC3A-C4E8-BEA71177B1FD}"/>
+              </a:ext>
+            </a:extLst>
+          </p:cNvPr>
+          <p:cNvSpPr>
+            <a:spLocks noGrp="1"/>
+          </p:cNvSpPr>
+          <p:nvPr>
+            <p:ph type="sldNum" sz="quarter" idx="12"/>
+          </p:nvPr>
+        </p:nvSpPr>
+        <p:spPr/>
+        <p:txBody>
+          <a:bodyPr/>
+          <a:lstStyle/>
+          <a:p>
+            <a:fld id="{5368CAA0-23FB-4232-908B-CB576EB202C9}" type="slidenum">
+              <a:rPr lang="de-CH" smtClean="0"/>
+              <a:t>27</a:t>
+            </a:fld>
+            <a:endParaRPr lang="de-CH"/>
+          </a:p>
+        </p:txBody>
+      </p:sp>
+      <p:pic>
+        <p:nvPicPr>
+          <p:cNvPr id="3" name="Picture 2">
+            <a:extLst>
+              <a:ext uri="{FF2B5EF4-FFF2-40B4-BE49-F238E27FC236}">
+                <a16:creationId xmlns:a16="http://schemas.microsoft.com/office/drawing/2014/main" id="{C56EF0ED-B3A7-7B6D-FC7C-B6A7101A1F82}"/>
+              </a:ext>
+            </a:extLst>
+          </p:cNvPr>
+          <p:cNvPicPr>
+            <a:picLocks noChangeAspect="1"/>
+          </p:cNvPicPr>
+          <p:nvPr/>
+        </p:nvPicPr>
+        <p:blipFill>
+          <a:blip r:embed="rId3"/>
+          <a:stretch>
+            <a:fillRect/>
+          </a:stretch>
+        </p:blipFill>
+        <p:spPr>
+          <a:xfrm>
+            <a:off x="2832410" y="1342207"/>
+            <a:ext cx="6353988" cy="5014143"/>
+          </a:xfrm>
+          <a:prstGeom prst="rect">
+            <a:avLst/>
+          </a:prstGeom>
+        </p:spPr>
+      </p:pic>
+    </p:spTree>
+    <p:extLst>
+      <p:ext uri="{BB962C8B-B14F-4D97-AF65-F5344CB8AC3E}">
+        <p14:creationId xmlns:p14="http://schemas.microsoft.com/office/powerpoint/2010/main" val="3021939887"/>
+      </p:ext>
+    </p:extLst>
+  </p:cSld>
+  <p:clrMapOvr>
+    <a:masterClrMapping/>
+  </p:clrMapOvr>
+</p:sld>
+</file>
+
+<file path=ppt/slides/slide28.xml><?xml version="1.0" encoding="utf-8"?>
+<p:sld xmlns:a="http://schemas.openxmlformats.org/drawingml/2006/main" xmlns:r="http://schemas.openxmlformats.org/officeDocument/2006/relationships" xmlns:p="http://schemas.openxmlformats.org/presentationml/2006/main">
+  <p:cSld>
+    <p:spTree>
+      <p:nvGrpSpPr>
+        <p:cNvPr id="1" name=""/>
+        <p:cNvGrpSpPr/>
+        <p:nvPr/>
+      </p:nvGrpSpPr>
+      <p:grpSpPr>
+        <a:xfrm>
+          <a:off x="0" y="0"/>
+          <a:ext cx="0" cy="0"/>
+          <a:chOff x="0" y="0"/>
+          <a:chExt cx="0" cy="0"/>
+        </a:xfrm>
+      </p:grpSpPr>
+      <p:sp>
+        <p:nvSpPr>
+          <p:cNvPr id="4" name="Rectangle 3">
+            <a:extLst>
+              <a:ext uri="{FF2B5EF4-FFF2-40B4-BE49-F238E27FC236}">
+                <a16:creationId xmlns:a16="http://schemas.microsoft.com/office/drawing/2014/main" id="{84DE0727-2AD0-60D0-4C5F-5A7C2346BAEF}"/>
+              </a:ext>
+            </a:extLst>
+          </p:cNvPr>
+          <p:cNvSpPr/>
+          <p:nvPr/>
+        </p:nvSpPr>
+        <p:spPr>
+          <a:xfrm>
+            <a:off x="0" y="-79377"/>
+            <a:ext cx="12192000" cy="1164879"/>
+          </a:xfrm>
+          <a:prstGeom prst="rect">
+            <a:avLst/>
+          </a:prstGeom>
+          <a:solidFill>
+            <a:srgbClr val="6AB7C6"/>
+          </a:solidFill>
+          <a:ln>
+            <a:noFill/>
+          </a:ln>
+        </p:spPr>
+        <p:style>
+          <a:lnRef idx="2">
+            <a:schemeClr val="accent1">
+              <a:shade val="50000"/>
+            </a:schemeClr>
+          </a:lnRef>
+          <a:fillRef idx="1">
+            <a:schemeClr val="accent1"/>
+          </a:fillRef>
+          <a:effectRef idx="0">
+            <a:schemeClr val="accent1"/>
+          </a:effectRef>
+          <a:fontRef idx="minor">
+            <a:schemeClr val="lt1"/>
+          </a:fontRef>
+        </p:style>
+        <p:txBody>
+          <a:bodyPr lIns="576000" rtlCol="0" anchor="ctr"/>
+          <a:lstStyle/>
+          <a:p>
+            <a:r>
+              <a:rPr lang="en-US" sz="4000" dirty="0">
+                <a:cs typeface="Courier New" panose="02070309020205020404" pitchFamily="49" charset="0"/>
+              </a:rPr>
+              <a:t>Secondary (direct) cause, 70+</a:t>
+            </a:r>
+            <a:endParaRPr lang="de-CH" sz="4000" dirty="0">
+              <a:cs typeface="Courier New" panose="02070309020205020404" pitchFamily="49" charset="0"/>
+            </a:endParaRPr>
+          </a:p>
+        </p:txBody>
+      </p:sp>
+      <p:sp>
+        <p:nvSpPr>
+          <p:cNvPr id="8" name="Slide Number Placeholder 7">
+            <a:extLst>
+              <a:ext uri="{FF2B5EF4-FFF2-40B4-BE49-F238E27FC236}">
+                <a16:creationId xmlns:a16="http://schemas.microsoft.com/office/drawing/2014/main" id="{D48339F2-FB24-BC3A-C4E8-BEA71177B1FD}"/>
+              </a:ext>
+            </a:extLst>
+          </p:cNvPr>
+          <p:cNvSpPr>
+            <a:spLocks noGrp="1"/>
+          </p:cNvSpPr>
+          <p:nvPr>
+            <p:ph type="sldNum" sz="quarter" idx="12"/>
+          </p:nvPr>
+        </p:nvSpPr>
+        <p:spPr/>
+        <p:txBody>
+          <a:bodyPr/>
+          <a:lstStyle/>
+          <a:p>
+            <a:fld id="{5368CAA0-23FB-4232-908B-CB576EB202C9}" type="slidenum">
+              <a:rPr lang="de-CH" smtClean="0"/>
+              <a:t>28</a:t>
+            </a:fld>
+            <a:endParaRPr lang="de-CH"/>
+          </a:p>
+        </p:txBody>
+      </p:sp>
+      <p:pic>
+        <p:nvPicPr>
+          <p:cNvPr id="3" name="Picture 2">
+            <a:extLst>
+              <a:ext uri="{FF2B5EF4-FFF2-40B4-BE49-F238E27FC236}">
+                <a16:creationId xmlns:a16="http://schemas.microsoft.com/office/drawing/2014/main" id="{D46A9190-EDC6-9021-1923-32A96F2759E4}"/>
+              </a:ext>
+            </a:extLst>
+          </p:cNvPr>
+          <p:cNvPicPr>
+            <a:picLocks noChangeAspect="1"/>
+          </p:cNvPicPr>
+          <p:nvPr/>
+        </p:nvPicPr>
+        <p:blipFill>
+          <a:blip r:embed="rId3"/>
+          <a:stretch>
+            <a:fillRect/>
+          </a:stretch>
+        </p:blipFill>
+        <p:spPr>
+          <a:xfrm>
+            <a:off x="1918008" y="1202177"/>
+            <a:ext cx="7110529" cy="5519298"/>
+          </a:xfrm>
+          <a:prstGeom prst="rect">
+            <a:avLst/>
+          </a:prstGeom>
+        </p:spPr>
+      </p:pic>
+    </p:spTree>
+    <p:extLst>
+      <p:ext uri="{BB962C8B-B14F-4D97-AF65-F5344CB8AC3E}">
+        <p14:creationId xmlns:p14="http://schemas.microsoft.com/office/powerpoint/2010/main" val="3800417759"/>
+      </p:ext>
+    </p:extLst>
+  </p:cSld>
+  <p:clrMapOvr>
+    <a:masterClrMapping/>
+  </p:clrMapOvr>
+</p:sld>
+</file>
+
+<file path=ppt/slides/slide29.xml><?xml version="1.0" encoding="utf-8"?>
+<p:sld xmlns:a="http://schemas.openxmlformats.org/drawingml/2006/main" xmlns:r="http://schemas.openxmlformats.org/officeDocument/2006/relationships" xmlns:p="http://schemas.openxmlformats.org/presentationml/2006/main">
+  <p:cSld>
+    <p:spTree>
+      <p:nvGrpSpPr>
+        <p:cNvPr id="1" name=""/>
+        <p:cNvGrpSpPr/>
+        <p:nvPr/>
+      </p:nvGrpSpPr>
+      <p:grpSpPr>
+        <a:xfrm>
+          <a:off x="0" y="0"/>
+          <a:ext cx="0" cy="0"/>
+          <a:chOff x="0" y="0"/>
+          <a:chExt cx="0" cy="0"/>
+        </a:xfrm>
+      </p:grpSpPr>
+      <p:sp>
+        <p:nvSpPr>
+          <p:cNvPr id="4" name="Rectangle 3">
+            <a:extLst>
+              <a:ext uri="{FF2B5EF4-FFF2-40B4-BE49-F238E27FC236}">
+                <a16:creationId xmlns:a16="http://schemas.microsoft.com/office/drawing/2014/main" id="{84DE0727-2AD0-60D0-4C5F-5A7C2346BAEF}"/>
+              </a:ext>
+            </a:extLst>
+          </p:cNvPr>
+          <p:cNvSpPr/>
+          <p:nvPr/>
+        </p:nvSpPr>
+        <p:spPr>
+          <a:xfrm>
+            <a:off x="0" y="-79377"/>
+            <a:ext cx="12192000" cy="1164879"/>
+          </a:xfrm>
+          <a:prstGeom prst="rect">
+            <a:avLst/>
+          </a:prstGeom>
+          <a:solidFill>
+            <a:srgbClr val="6AB7C6"/>
+          </a:solidFill>
+          <a:ln>
+            <a:noFill/>
+          </a:ln>
+        </p:spPr>
+        <p:style>
+          <a:lnRef idx="2">
+            <a:schemeClr val="accent1">
+              <a:shade val="50000"/>
+            </a:schemeClr>
+          </a:lnRef>
+          <a:fillRef idx="1">
+            <a:schemeClr val="accent1"/>
+          </a:fillRef>
+          <a:effectRef idx="0">
+            <a:schemeClr val="accent1"/>
+          </a:effectRef>
+          <a:fontRef idx="minor">
+            <a:schemeClr val="lt1"/>
+          </a:fontRef>
+        </p:style>
+        <p:txBody>
+          <a:bodyPr lIns="576000" rtlCol="0" anchor="ctr"/>
+          <a:lstStyle/>
+          <a:p>
+            <a:r>
+              <a:rPr lang="en-US" sz="4000" dirty="0">
+                <a:cs typeface="Courier New" panose="02070309020205020404" pitchFamily="49" charset="0"/>
+              </a:rPr>
+              <a:t>Secondary (direct) cause, 70+</a:t>
+            </a:r>
+            <a:endParaRPr lang="de-CH" sz="4000" dirty="0">
+              <a:cs typeface="Courier New" panose="02070309020205020404" pitchFamily="49" charset="0"/>
+            </a:endParaRPr>
+          </a:p>
+        </p:txBody>
+      </p:sp>
+      <p:sp>
+        <p:nvSpPr>
+          <p:cNvPr id="8" name="Slide Number Placeholder 7">
+            <a:extLst>
+              <a:ext uri="{FF2B5EF4-FFF2-40B4-BE49-F238E27FC236}">
+                <a16:creationId xmlns:a16="http://schemas.microsoft.com/office/drawing/2014/main" id="{D48339F2-FB24-BC3A-C4E8-BEA71177B1FD}"/>
+              </a:ext>
+            </a:extLst>
+          </p:cNvPr>
+          <p:cNvSpPr>
+            <a:spLocks noGrp="1"/>
+          </p:cNvSpPr>
+          <p:nvPr>
+            <p:ph type="sldNum" sz="quarter" idx="12"/>
+          </p:nvPr>
+        </p:nvSpPr>
+        <p:spPr/>
+        <p:txBody>
+          <a:bodyPr/>
+          <a:lstStyle/>
+          <a:p>
+            <a:fld id="{5368CAA0-23FB-4232-908B-CB576EB202C9}" type="slidenum">
+              <a:rPr lang="de-CH" smtClean="0"/>
+              <a:t>29</a:t>
+            </a:fld>
+            <a:endParaRPr lang="de-CH"/>
+          </a:p>
+        </p:txBody>
+      </p:sp>
+      <p:pic>
+        <p:nvPicPr>
+          <p:cNvPr id="7" name="Picture 6">
+            <a:extLst>
+              <a:ext uri="{FF2B5EF4-FFF2-40B4-BE49-F238E27FC236}">
+                <a16:creationId xmlns:a16="http://schemas.microsoft.com/office/drawing/2014/main" id="{0B511FC7-061D-E9C7-DAB7-C184DEBBCFC4}"/>
+              </a:ext>
+            </a:extLst>
+          </p:cNvPr>
+          <p:cNvPicPr>
+            <a:picLocks noChangeAspect="1"/>
+          </p:cNvPicPr>
+          <p:nvPr/>
+        </p:nvPicPr>
+        <p:blipFill>
+          <a:blip r:embed="rId3"/>
+          <a:stretch>
+            <a:fillRect/>
+          </a:stretch>
+        </p:blipFill>
+        <p:spPr>
+          <a:xfrm>
+            <a:off x="2155089" y="1190625"/>
+            <a:ext cx="7458075" cy="5667375"/>
+          </a:xfrm>
+          <a:prstGeom prst="rect">
+            <a:avLst/>
+          </a:prstGeom>
+        </p:spPr>
+      </p:pic>
+    </p:spTree>
+    <p:extLst>
+      <p:ext uri="{BB962C8B-B14F-4D97-AF65-F5344CB8AC3E}">
+        <p14:creationId xmlns:p14="http://schemas.microsoft.com/office/powerpoint/2010/main" val="2578200167"/>
+      </p:ext>
+    </p:extLst>
+  </p:cSld>
+  <p:clrMapOvr>
+    <a:masterClrMapping/>
+  </p:clrMapOvr>
+</p:sld>
+</file>
+
+<file path=ppt/slides/slide3.xml><?xml version="1.0" encoding="utf-8"?>
+<p:sld xmlns:a="http://schemas.openxmlformats.org/drawingml/2006/main" xmlns:r="http://schemas.openxmlformats.org/officeDocument/2006/relationships" xmlns:p="http://schemas.openxmlformats.org/presentationml/2006/main">
+  <p:cSld>
+    <p:spTree>
+      <p:nvGrpSpPr>
+        <p:cNvPr id="1" name=""/>
+        <p:cNvGrpSpPr/>
+        <p:nvPr/>
+      </p:nvGrpSpPr>
+      <p:grpSpPr>
+        <a:xfrm>
+          <a:off x="0" y="0"/>
+          <a:ext cx="0" cy="0"/>
+          <a:chOff x="0" y="0"/>
+          <a:chExt cx="0" cy="0"/>
+        </a:xfrm>
+      </p:grpSpPr>
+      <p:sp>
+        <p:nvSpPr>
+          <p:cNvPr id="4" name="Rectangle 3">
+            <a:extLst>
+              <a:ext uri="{FF2B5EF4-FFF2-40B4-BE49-F238E27FC236}">
+                <a16:creationId xmlns:a16="http://schemas.microsoft.com/office/drawing/2014/main" id="{84DE0727-2AD0-60D0-4C5F-5A7C2346BAEF}"/>
+              </a:ext>
+            </a:extLst>
+          </p:cNvPr>
+          <p:cNvSpPr/>
+          <p:nvPr/>
+        </p:nvSpPr>
+        <p:spPr>
+          <a:xfrm>
+            <a:off x="0" y="-79377"/>
+            <a:ext cx="12192000" cy="1164879"/>
+          </a:xfrm>
+          <a:prstGeom prst="rect">
+            <a:avLst/>
+          </a:prstGeom>
+          <a:solidFill>
+            <a:srgbClr val="6AB7C6"/>
+          </a:solidFill>
+          <a:ln>
+            <a:noFill/>
+          </a:ln>
+        </p:spPr>
+        <p:style>
+          <a:lnRef idx="2">
+            <a:schemeClr val="accent1">
+              <a:shade val="50000"/>
+            </a:schemeClr>
+          </a:lnRef>
+          <a:fillRef idx="1">
+            <a:schemeClr val="accent1"/>
+          </a:fillRef>
+          <a:effectRef idx="0">
+            <a:schemeClr val="accent1"/>
+          </a:effectRef>
+          <a:fontRef idx="minor">
+            <a:schemeClr val="lt1"/>
+          </a:fontRef>
+        </p:style>
+        <p:txBody>
+          <a:bodyPr lIns="576000" rtlCol="0" anchor="ctr"/>
+          <a:lstStyle/>
+          <a:p>
+            <a:r>
+              <a:rPr lang="en-US" sz="4000" dirty="0">
+                <a:cs typeface="Courier New" panose="02070309020205020404" pitchFamily="49" charset="0"/>
+              </a:rPr>
               <a:t>Objectives</a:t>
             </a:r>
             <a:endParaRPr lang="de-CH" sz="4000" dirty="0">
@@ -10530,6 +12712,1843 @@
     <p:extLst>
       <p:ext uri="{BB962C8B-B14F-4D97-AF65-F5344CB8AC3E}">
         <p14:creationId xmlns:p14="http://schemas.microsoft.com/office/powerpoint/2010/main" val="2953990467"/>
+      </p:ext>
+    </p:extLst>
+  </p:cSld>
+  <p:clrMapOvr>
+    <a:masterClrMapping/>
+  </p:clrMapOvr>
+</p:sld>
+</file>
+
+<file path=ppt/slides/slide30.xml><?xml version="1.0" encoding="utf-8"?>
+<p:sld xmlns:a="http://schemas.openxmlformats.org/drawingml/2006/main" xmlns:r="http://schemas.openxmlformats.org/officeDocument/2006/relationships" xmlns:p="http://schemas.openxmlformats.org/presentationml/2006/main">
+  <p:cSld>
+    <p:spTree>
+      <p:nvGrpSpPr>
+        <p:cNvPr id="1" name=""/>
+        <p:cNvGrpSpPr/>
+        <p:nvPr/>
+      </p:nvGrpSpPr>
+      <p:grpSpPr>
+        <a:xfrm>
+          <a:off x="0" y="0"/>
+          <a:ext cx="0" cy="0"/>
+          <a:chOff x="0" y="0"/>
+          <a:chExt cx="0" cy="0"/>
+        </a:xfrm>
+      </p:grpSpPr>
+      <p:sp>
+        <p:nvSpPr>
+          <p:cNvPr id="4" name="Rectangle 3">
+            <a:extLst>
+              <a:ext uri="{FF2B5EF4-FFF2-40B4-BE49-F238E27FC236}">
+                <a16:creationId xmlns:a16="http://schemas.microsoft.com/office/drawing/2014/main" id="{84DE0727-2AD0-60D0-4C5F-5A7C2346BAEF}"/>
+              </a:ext>
+            </a:extLst>
+          </p:cNvPr>
+          <p:cNvSpPr/>
+          <p:nvPr/>
+        </p:nvSpPr>
+        <p:spPr>
+          <a:xfrm>
+            <a:off x="0" y="-79377"/>
+            <a:ext cx="12192000" cy="1164879"/>
+          </a:xfrm>
+          <a:prstGeom prst="rect">
+            <a:avLst/>
+          </a:prstGeom>
+          <a:solidFill>
+            <a:srgbClr val="6AB7C6"/>
+          </a:solidFill>
+          <a:ln>
+            <a:noFill/>
+          </a:ln>
+        </p:spPr>
+        <p:style>
+          <a:lnRef idx="2">
+            <a:schemeClr val="accent1">
+              <a:shade val="50000"/>
+            </a:schemeClr>
+          </a:lnRef>
+          <a:fillRef idx="1">
+            <a:schemeClr val="accent1"/>
+          </a:fillRef>
+          <a:effectRef idx="0">
+            <a:schemeClr val="accent1"/>
+          </a:effectRef>
+          <a:fontRef idx="minor">
+            <a:schemeClr val="lt1"/>
+          </a:fontRef>
+        </p:style>
+        <p:txBody>
+          <a:bodyPr lIns="576000" rtlCol="0" anchor="ctr"/>
+          <a:lstStyle/>
+          <a:p>
+            <a:r>
+              <a:rPr lang="en-US" sz="4000" dirty="0">
+                <a:cs typeface="Courier New" panose="02070309020205020404" pitchFamily="49" charset="0"/>
+              </a:rPr>
+              <a:t>Secondary (direct) cause, 70+</a:t>
+            </a:r>
+            <a:endParaRPr lang="de-CH" sz="4000" dirty="0">
+              <a:cs typeface="Courier New" panose="02070309020205020404" pitchFamily="49" charset="0"/>
+            </a:endParaRPr>
+          </a:p>
+        </p:txBody>
+      </p:sp>
+      <p:sp>
+        <p:nvSpPr>
+          <p:cNvPr id="8" name="Slide Number Placeholder 7">
+            <a:extLst>
+              <a:ext uri="{FF2B5EF4-FFF2-40B4-BE49-F238E27FC236}">
+                <a16:creationId xmlns:a16="http://schemas.microsoft.com/office/drawing/2014/main" id="{D48339F2-FB24-BC3A-C4E8-BEA71177B1FD}"/>
+              </a:ext>
+            </a:extLst>
+          </p:cNvPr>
+          <p:cNvSpPr>
+            <a:spLocks noGrp="1"/>
+          </p:cNvSpPr>
+          <p:nvPr>
+            <p:ph type="sldNum" sz="quarter" idx="12"/>
+          </p:nvPr>
+        </p:nvSpPr>
+        <p:spPr/>
+        <p:txBody>
+          <a:bodyPr/>
+          <a:lstStyle/>
+          <a:p>
+            <a:fld id="{5368CAA0-23FB-4232-908B-CB576EB202C9}" type="slidenum">
+              <a:rPr lang="de-CH" smtClean="0"/>
+              <a:t>30</a:t>
+            </a:fld>
+            <a:endParaRPr lang="de-CH"/>
+          </a:p>
+        </p:txBody>
+      </p:sp>
+      <p:graphicFrame>
+        <p:nvGraphicFramePr>
+          <p:cNvPr id="2" name="Table 1">
+            <a:extLst>
+              <a:ext uri="{FF2B5EF4-FFF2-40B4-BE49-F238E27FC236}">
+                <a16:creationId xmlns:a16="http://schemas.microsoft.com/office/drawing/2014/main" id="{276D7472-BFEF-4B6E-A404-F9DE35D3A28B}"/>
+              </a:ext>
+            </a:extLst>
+          </p:cNvPr>
+          <p:cNvGraphicFramePr>
+            <a:graphicFrameLocks noGrp="1"/>
+          </p:cNvGraphicFramePr>
+          <p:nvPr>
+            <p:extLst>
+              <p:ext uri="{D42A27DB-BD31-4B8C-83A1-F6EECF244321}">
+                <p14:modId xmlns:p14="http://schemas.microsoft.com/office/powerpoint/2010/main" val="140672909"/>
+              </p:ext>
+            </p:extLst>
+          </p:nvPr>
+        </p:nvGraphicFramePr>
+        <p:xfrm>
+          <a:off x="699358" y="1410055"/>
+          <a:ext cx="9414798" cy="4550044"/>
+        </p:xfrm>
+        <a:graphic>
+          <a:graphicData uri="http://schemas.openxmlformats.org/drawingml/2006/table">
+            <a:tbl>
+              <a:tblPr/>
+              <a:tblGrid>
+                <a:gridCol w="3388582">
+                  <a:extLst>
+                    <a:ext uri="{9D8B030D-6E8A-4147-A177-3AD203B41FA5}">
+                      <a16:colId xmlns:a16="http://schemas.microsoft.com/office/drawing/2014/main" val="634666044"/>
+                    </a:ext>
+                  </a:extLst>
+                </a:gridCol>
+                <a:gridCol w="3160353">
+                  <a:extLst>
+                    <a:ext uri="{9D8B030D-6E8A-4147-A177-3AD203B41FA5}">
+                      <a16:colId xmlns:a16="http://schemas.microsoft.com/office/drawing/2014/main" val="3580525129"/>
+                    </a:ext>
+                  </a:extLst>
+                </a:gridCol>
+                <a:gridCol w="1558046">
+                  <a:extLst>
+                    <a:ext uri="{9D8B030D-6E8A-4147-A177-3AD203B41FA5}">
+                      <a16:colId xmlns:a16="http://schemas.microsoft.com/office/drawing/2014/main" val="3307468692"/>
+                    </a:ext>
+                  </a:extLst>
+                </a:gridCol>
+                <a:gridCol w="1307817">
+                  <a:extLst>
+                    <a:ext uri="{9D8B030D-6E8A-4147-A177-3AD203B41FA5}">
+                      <a16:colId xmlns:a16="http://schemas.microsoft.com/office/drawing/2014/main" val="2747617234"/>
+                    </a:ext>
+                  </a:extLst>
+                </a:gridCol>
+              </a:tblGrid>
+              <a:tr h="177606">
+                <a:tc>
+                  <a:txBody>
+                    <a:bodyPr/>
+                    <a:lstStyle/>
+                    <a:p>
+                      <a:r>
+                        <a:rPr lang="fr-CH" sz="1200" dirty="0" err="1"/>
+                        <a:t>Mechanism</a:t>
+                      </a:r>
+                      <a:endParaRPr lang="fr-CH" sz="1200" dirty="0"/>
+                    </a:p>
+                  </a:txBody>
+                  <a:tcPr marL="44401" marR="44401" marT="22201" marB="22201" anchor="ctr">
+                    <a:lnL>
+                      <a:noFill/>
+                    </a:lnL>
+                    <a:lnR>
+                      <a:noFill/>
+                    </a:lnR>
+                    <a:lnT>
+                      <a:noFill/>
+                    </a:lnT>
+                    <a:lnB>
+                      <a:noFill/>
+                    </a:lnB>
+                    <a:noFill/>
+                  </a:tcPr>
+                </a:tc>
+                <a:tc>
+                  <a:txBody>
+                    <a:bodyPr/>
+                    <a:lstStyle/>
+                    <a:p>
+                      <a:r>
+                        <a:rPr lang="fr-CH" sz="1200"/>
+                        <a:t>Causal Type</a:t>
+                      </a:r>
+                    </a:p>
+                  </a:txBody>
+                  <a:tcPr marL="44401" marR="44401" marT="22201" marB="22201" anchor="ctr">
+                    <a:lnL>
+                      <a:noFill/>
+                    </a:lnL>
+                    <a:lnR>
+                      <a:noFill/>
+                    </a:lnR>
+                    <a:lnT>
+                      <a:noFill/>
+                    </a:lnT>
+                    <a:lnB>
+                      <a:noFill/>
+                    </a:lnB>
+                    <a:noFill/>
+                  </a:tcPr>
+                </a:tc>
+                <a:tc>
+                  <a:txBody>
+                    <a:bodyPr/>
+                    <a:lstStyle/>
+                    <a:p>
+                      <a:r>
+                        <a:rPr lang="fr-CH" sz="1200" dirty="0"/>
+                        <a:t>Causal Diagram Shape</a:t>
+                      </a:r>
+                    </a:p>
+                  </a:txBody>
+                  <a:tcPr marL="44401" marR="44401" marT="22201" marB="22201" anchor="ctr">
+                    <a:lnL>
+                      <a:noFill/>
+                    </a:lnL>
+                    <a:lnR>
+                      <a:noFill/>
+                    </a:lnR>
+                    <a:lnT>
+                      <a:noFill/>
+                    </a:lnT>
+                    <a:lnB>
+                      <a:noFill/>
+                    </a:lnB>
+                    <a:noFill/>
+                  </a:tcPr>
+                </a:tc>
+                <a:tc>
+                  <a:txBody>
+                    <a:bodyPr/>
+                    <a:lstStyle/>
+                    <a:p>
+                      <a:r>
+                        <a:rPr lang="fr-CH" sz="1200" dirty="0"/>
+                        <a:t>Notes</a:t>
+                      </a:r>
+                    </a:p>
+                  </a:txBody>
+                  <a:tcPr marL="44401" marR="44401" marT="22201" marB="22201" anchor="ctr">
+                    <a:lnL>
+                      <a:noFill/>
+                    </a:lnL>
+                    <a:lnR>
+                      <a:noFill/>
+                    </a:lnR>
+                    <a:lnT>
+                      <a:noFill/>
+                    </a:lnT>
+                    <a:lnB>
+                      <a:noFill/>
+                    </a:lnB>
+                    <a:noFill/>
+                  </a:tcPr>
+                </a:tc>
+                <a:extLst>
+                  <a:ext uri="{0D108BD9-81ED-4DB2-BD59-A6C34878D82A}">
+                    <a16:rowId xmlns:a16="http://schemas.microsoft.com/office/drawing/2014/main" val="4273723594"/>
+                  </a:ext>
+                </a:extLst>
+              </a:tr>
+              <a:tr h="177606">
+                <a:tc>
+                  <a:txBody>
+                    <a:bodyPr/>
+                    <a:lstStyle/>
+                    <a:p>
+                      <a:r>
+                        <a:rPr lang="fr-CH" sz="1200" b="1"/>
+                        <a:t>1. Shared External Drivers</a:t>
+                      </a:r>
+                      <a:endParaRPr lang="fr-CH" sz="1200"/>
+                    </a:p>
+                  </a:txBody>
+                  <a:tcPr marL="44401" marR="44401" marT="22201" marB="22201" anchor="ctr">
+                    <a:lnL>
+                      <a:noFill/>
+                    </a:lnL>
+                    <a:lnR>
+                      <a:noFill/>
+                    </a:lnR>
+                    <a:lnT>
+                      <a:noFill/>
+                    </a:lnT>
+                    <a:lnB>
+                      <a:noFill/>
+                    </a:lnB>
+                    <a:noFill/>
+                  </a:tcPr>
+                </a:tc>
+                <a:tc>
+                  <a:txBody>
+                    <a:bodyPr/>
+                    <a:lstStyle/>
+                    <a:p>
+                      <a:r>
+                        <a:rPr lang="fr-CH" sz="1200" b="1"/>
+                        <a:t>Confounding</a:t>
+                      </a:r>
+                      <a:endParaRPr lang="fr-CH" sz="1200"/>
+                    </a:p>
+                  </a:txBody>
+                  <a:tcPr marL="44401" marR="44401" marT="22201" marB="22201" anchor="ctr">
+                    <a:lnL>
+                      <a:noFill/>
+                    </a:lnL>
+                    <a:lnR>
+                      <a:noFill/>
+                    </a:lnR>
+                    <a:lnT>
+                      <a:noFill/>
+                    </a:lnT>
+                    <a:lnB>
+                      <a:noFill/>
+                    </a:lnB>
+                    <a:noFill/>
+                  </a:tcPr>
+                </a:tc>
+                <a:tc>
+                  <a:txBody>
+                    <a:bodyPr/>
+                    <a:lstStyle/>
+                    <a:p>
+                      <a:endParaRPr lang="fr-CH" sz="1200"/>
+                    </a:p>
+                  </a:txBody>
+                  <a:tcPr marL="44401" marR="44401" marT="22201" marB="22201" anchor="ctr">
+                    <a:lnL>
+                      <a:noFill/>
+                    </a:lnL>
+                    <a:lnR>
+                      <a:noFill/>
+                    </a:lnR>
+                    <a:lnT>
+                      <a:noFill/>
+                    </a:lnT>
+                    <a:lnB>
+                      <a:noFill/>
+                    </a:lnB>
+                    <a:noFill/>
+                  </a:tcPr>
+                </a:tc>
+                <a:tc>
+                  <a:txBody>
+                    <a:bodyPr/>
+                    <a:lstStyle/>
+                    <a:p>
+                      <a:endParaRPr lang="fr-CH" sz="1200" dirty="0"/>
+                    </a:p>
+                  </a:txBody>
+                  <a:tcPr marL="44401" marR="44401" marT="22201" marB="22201" anchor="ctr">
+                    <a:lnL>
+                      <a:noFill/>
+                    </a:lnL>
+                    <a:lnR>
+                      <a:noFill/>
+                    </a:lnR>
+                    <a:lnT>
+                      <a:noFill/>
+                    </a:lnT>
+                    <a:lnB>
+                      <a:noFill/>
+                    </a:lnB>
+                    <a:noFill/>
+                  </a:tcPr>
+                </a:tc>
+                <a:extLst>
+                  <a:ext uri="{0D108BD9-81ED-4DB2-BD59-A6C34878D82A}">
+                    <a16:rowId xmlns:a16="http://schemas.microsoft.com/office/drawing/2014/main" val="2556371925"/>
+                  </a:ext>
+                </a:extLst>
+              </a:tr>
+              <a:tr h="185479">
+                <a:tc>
+                  <a:txBody>
+                    <a:bodyPr/>
+                    <a:lstStyle/>
+                    <a:p>
+                      <a:r>
+                        <a:rPr lang="fr-CH" sz="1200" dirty="0"/>
+                        <a:t> Temp/</a:t>
+                      </a:r>
+                      <a:r>
+                        <a:rPr lang="fr-CH" sz="1200" dirty="0" err="1"/>
+                        <a:t>Flu</a:t>
+                      </a:r>
+                      <a:r>
+                        <a:rPr lang="fr-CH" sz="1200" dirty="0"/>
+                        <a:t> → </a:t>
+                      </a:r>
+                      <a:r>
+                        <a:rPr lang="fr-CH" sz="1200" dirty="0" err="1"/>
+                        <a:t>Resp</a:t>
+                      </a:r>
+                      <a:endParaRPr lang="fr-CH" sz="1200" dirty="0"/>
+                    </a:p>
+                  </a:txBody>
+                  <a:tcPr marL="44401" marR="44401" marT="22201" marB="22201" anchor="ctr">
+                    <a:lnL>
+                      <a:noFill/>
+                    </a:lnL>
+                    <a:lnR>
+                      <a:noFill/>
+                    </a:lnR>
+                    <a:lnT>
+                      <a:noFill/>
+                    </a:lnT>
+                    <a:lnB>
+                      <a:noFill/>
+                    </a:lnB>
+                    <a:noFill/>
+                  </a:tcPr>
+                </a:tc>
+                <a:tc>
+                  <a:txBody>
+                    <a:bodyPr/>
+                    <a:lstStyle/>
+                    <a:p>
+                      <a:endParaRPr lang="fr-CH" sz="1200" dirty="0"/>
+                    </a:p>
+                  </a:txBody>
+                  <a:tcPr marL="44401" marR="44401" marT="22201" marB="22201" anchor="ctr">
+                    <a:lnL>
+                      <a:noFill/>
+                    </a:lnL>
+                    <a:lnR>
+                      <a:noFill/>
+                    </a:lnR>
+                    <a:lnT>
+                      <a:noFill/>
+                    </a:lnT>
+                    <a:lnB>
+                      <a:noFill/>
+                    </a:lnB>
+                    <a:noFill/>
+                  </a:tcPr>
+                </a:tc>
+                <a:tc>
+                  <a:txBody>
+                    <a:bodyPr/>
+                    <a:lstStyle/>
+                    <a:p>
+                      <a:endParaRPr lang="fr-CH" sz="1200"/>
+                    </a:p>
+                  </a:txBody>
+                  <a:tcPr marL="44401" marR="44401" marT="22201" marB="22201" anchor="ctr">
+                    <a:lnL>
+                      <a:noFill/>
+                    </a:lnL>
+                    <a:lnR>
+                      <a:noFill/>
+                    </a:lnR>
+                    <a:lnT>
+                      <a:noFill/>
+                    </a:lnT>
+                    <a:lnB>
+                      <a:noFill/>
+                    </a:lnB>
+                    <a:noFill/>
+                  </a:tcPr>
+                </a:tc>
+                <a:tc>
+                  <a:txBody>
+                    <a:bodyPr/>
+                    <a:lstStyle/>
+                    <a:p>
+                      <a:endParaRPr lang="fr-CH" sz="1200" dirty="0"/>
+                    </a:p>
+                  </a:txBody>
+                  <a:tcPr marL="44401" marR="44401" marT="22201" marB="22201" anchor="ctr">
+                    <a:lnL>
+                      <a:noFill/>
+                    </a:lnL>
+                    <a:lnR>
+                      <a:noFill/>
+                    </a:lnR>
+                    <a:lnT>
+                      <a:noFill/>
+                    </a:lnT>
+                    <a:lnB>
+                      <a:noFill/>
+                    </a:lnB>
+                    <a:noFill/>
+                  </a:tcPr>
+                </a:tc>
+                <a:extLst>
+                  <a:ext uri="{0D108BD9-81ED-4DB2-BD59-A6C34878D82A}">
+                    <a16:rowId xmlns:a16="http://schemas.microsoft.com/office/drawing/2014/main" val="900163260"/>
+                  </a:ext>
+                </a:extLst>
+              </a:tr>
+              <a:tr h="444014">
+                <a:tc>
+                  <a:txBody>
+                    <a:bodyPr/>
+                    <a:lstStyle/>
+                    <a:p>
+                      <a:r>
+                        <a:rPr lang="fr-CH" sz="1200" dirty="0"/>
+                        <a:t> Temp/</a:t>
+                      </a:r>
+                      <a:r>
+                        <a:rPr lang="fr-CH" sz="1200" dirty="0" err="1"/>
+                        <a:t>Flu</a:t>
+                      </a:r>
+                      <a:r>
+                        <a:rPr lang="fr-CH" sz="1200" dirty="0"/>
+                        <a:t> → CVD</a:t>
+                      </a:r>
+                    </a:p>
+                  </a:txBody>
+                  <a:tcPr marL="44401" marR="44401" marT="22201" marB="22201" anchor="ctr">
+                    <a:lnL>
+                      <a:noFill/>
+                    </a:lnL>
+                    <a:lnR>
+                      <a:noFill/>
+                    </a:lnR>
+                    <a:lnT>
+                      <a:noFill/>
+                    </a:lnT>
+                    <a:lnB>
+                      <a:noFill/>
+                    </a:lnB>
+                    <a:noFill/>
+                  </a:tcPr>
+                </a:tc>
+                <a:tc>
+                  <a:txBody>
+                    <a:bodyPr/>
+                    <a:lstStyle/>
+                    <a:p>
+                      <a:r>
+                        <a:rPr lang="en-US" sz="1200" dirty="0"/>
+                        <a:t>Spurious correlation at population level, no direct link between outcomes</a:t>
+                      </a:r>
+                    </a:p>
+                  </a:txBody>
+                  <a:tcPr marL="44401" marR="44401" marT="22201" marB="22201" anchor="ctr">
+                    <a:lnL>
+                      <a:noFill/>
+                    </a:lnL>
+                    <a:lnR>
+                      <a:noFill/>
+                    </a:lnR>
+                    <a:lnT>
+                      <a:noFill/>
+                    </a:lnT>
+                    <a:lnB>
+                      <a:noFill/>
+                    </a:lnB>
+                    <a:noFill/>
+                  </a:tcPr>
+                </a:tc>
+                <a:tc>
+                  <a:txBody>
+                    <a:bodyPr/>
+                    <a:lstStyle/>
+                    <a:p>
+                      <a:endParaRPr lang="fr-CH" sz="1200" dirty="0"/>
+                    </a:p>
+                  </a:txBody>
+                  <a:tcPr marL="44401" marR="44401" marT="22201" marB="22201" anchor="ctr">
+                    <a:lnL>
+                      <a:noFill/>
+                    </a:lnL>
+                    <a:lnR>
+                      <a:noFill/>
+                    </a:lnR>
+                    <a:lnT>
+                      <a:noFill/>
+                    </a:lnT>
+                    <a:lnB>
+                      <a:noFill/>
+                    </a:lnB>
+                    <a:noFill/>
+                  </a:tcPr>
+                </a:tc>
+                <a:tc>
+                  <a:txBody>
+                    <a:bodyPr/>
+                    <a:lstStyle/>
+                    <a:p>
+                      <a:endParaRPr lang="fr-CH" sz="1200" dirty="0"/>
+                    </a:p>
+                  </a:txBody>
+                  <a:tcPr marL="44401" marR="44401" marT="22201" marB="22201" anchor="ctr">
+                    <a:lnL>
+                      <a:noFill/>
+                    </a:lnL>
+                    <a:lnR>
+                      <a:noFill/>
+                    </a:lnR>
+                    <a:lnT>
+                      <a:noFill/>
+                    </a:lnT>
+                    <a:lnB>
+                      <a:noFill/>
+                    </a:lnB>
+                    <a:noFill/>
+                  </a:tcPr>
+                </a:tc>
+                <a:extLst>
+                  <a:ext uri="{0D108BD9-81ED-4DB2-BD59-A6C34878D82A}">
+                    <a16:rowId xmlns:a16="http://schemas.microsoft.com/office/drawing/2014/main" val="1754735206"/>
+                  </a:ext>
+                </a:extLst>
+              </a:tr>
+              <a:tr h="310810">
+                <a:tc>
+                  <a:txBody>
+                    <a:bodyPr/>
+                    <a:lstStyle/>
+                    <a:p>
+                      <a:r>
+                        <a:rPr lang="fr-CH" sz="1200" b="1"/>
+                        <a:t>2. Mortality Displacement</a:t>
+                      </a:r>
+                      <a:endParaRPr lang="fr-CH" sz="1200"/>
+                    </a:p>
+                  </a:txBody>
+                  <a:tcPr marL="44401" marR="44401" marT="22201" marB="22201" anchor="ctr">
+                    <a:lnL>
+                      <a:noFill/>
+                    </a:lnL>
+                    <a:lnR>
+                      <a:noFill/>
+                    </a:lnR>
+                    <a:lnT>
+                      <a:noFill/>
+                    </a:lnT>
+                    <a:lnB>
+                      <a:noFill/>
+                    </a:lnB>
+                    <a:noFill/>
+                  </a:tcPr>
+                </a:tc>
+                <a:tc>
+                  <a:txBody>
+                    <a:bodyPr/>
+                    <a:lstStyle/>
+                    <a:p>
+                      <a:r>
+                        <a:rPr lang="fr-CH" sz="1200" b="1"/>
+                        <a:t>Competing risk / collider bias</a:t>
+                      </a:r>
+                      <a:endParaRPr lang="fr-CH" sz="1200"/>
+                    </a:p>
+                  </a:txBody>
+                  <a:tcPr marL="44401" marR="44401" marT="22201" marB="22201" anchor="ctr">
+                    <a:lnL>
+                      <a:noFill/>
+                    </a:lnL>
+                    <a:lnR>
+                      <a:noFill/>
+                    </a:lnR>
+                    <a:lnT>
+                      <a:noFill/>
+                    </a:lnT>
+                    <a:lnB>
+                      <a:noFill/>
+                    </a:lnB>
+                    <a:noFill/>
+                  </a:tcPr>
+                </a:tc>
+                <a:tc>
+                  <a:txBody>
+                    <a:bodyPr/>
+                    <a:lstStyle/>
+                    <a:p>
+                      <a:endParaRPr lang="fr-CH" sz="1200"/>
+                    </a:p>
+                  </a:txBody>
+                  <a:tcPr marL="44401" marR="44401" marT="22201" marB="22201" anchor="ctr">
+                    <a:lnL>
+                      <a:noFill/>
+                    </a:lnL>
+                    <a:lnR>
+                      <a:noFill/>
+                    </a:lnR>
+                    <a:lnT>
+                      <a:noFill/>
+                    </a:lnT>
+                    <a:lnB>
+                      <a:noFill/>
+                    </a:lnB>
+                    <a:noFill/>
+                  </a:tcPr>
+                </a:tc>
+                <a:tc>
+                  <a:txBody>
+                    <a:bodyPr/>
+                    <a:lstStyle/>
+                    <a:p>
+                      <a:endParaRPr lang="fr-CH" sz="1200"/>
+                    </a:p>
+                  </a:txBody>
+                  <a:tcPr marL="44401" marR="44401" marT="22201" marB="22201" anchor="ctr">
+                    <a:lnL>
+                      <a:noFill/>
+                    </a:lnL>
+                    <a:lnR>
+                      <a:noFill/>
+                    </a:lnR>
+                    <a:lnT>
+                      <a:noFill/>
+                    </a:lnT>
+                    <a:lnB>
+                      <a:noFill/>
+                    </a:lnB>
+                    <a:noFill/>
+                  </a:tcPr>
+                </a:tc>
+                <a:extLst>
+                  <a:ext uri="{0D108BD9-81ED-4DB2-BD59-A6C34878D82A}">
+                    <a16:rowId xmlns:a16="http://schemas.microsoft.com/office/drawing/2014/main" val="1062774489"/>
+                  </a:ext>
+                </a:extLst>
+              </a:tr>
+              <a:tr h="310810">
+                <a:tc>
+                  <a:txBody>
+                    <a:bodyPr/>
+                    <a:lstStyle/>
+                    <a:p>
+                      <a:r>
+                        <a:rPr lang="en-US" sz="1200" dirty="0"/>
+                        <a:t> Frailty → (Resp or CVD)</a:t>
+                      </a:r>
+                    </a:p>
+                  </a:txBody>
+                  <a:tcPr marL="44401" marR="44401" marT="22201" marB="22201" anchor="ctr">
+                    <a:lnL>
+                      <a:noFill/>
+                    </a:lnL>
+                    <a:lnR>
+                      <a:noFill/>
+                    </a:lnR>
+                    <a:lnT>
+                      <a:noFill/>
+                    </a:lnT>
+                    <a:lnB>
+                      <a:noFill/>
+                    </a:lnB>
+                    <a:noFill/>
+                  </a:tcPr>
+                </a:tc>
+                <a:tc>
+                  <a:txBody>
+                    <a:bodyPr/>
+                    <a:lstStyle/>
+                    <a:p>
+                      <a:endParaRPr lang="fr-CH" sz="1200"/>
+                    </a:p>
+                  </a:txBody>
+                  <a:tcPr marL="44401" marR="44401" marT="22201" marB="22201" anchor="ctr">
+                    <a:lnL>
+                      <a:noFill/>
+                    </a:lnL>
+                    <a:lnR>
+                      <a:noFill/>
+                    </a:lnR>
+                    <a:lnT>
+                      <a:noFill/>
+                    </a:lnT>
+                    <a:lnB>
+                      <a:noFill/>
+                    </a:lnB>
+                    <a:noFill/>
+                  </a:tcPr>
+                </a:tc>
+                <a:tc>
+                  <a:txBody>
+                    <a:bodyPr/>
+                    <a:lstStyle/>
+                    <a:p>
+                      <a:endParaRPr lang="fr-CH" sz="1200"/>
+                    </a:p>
+                  </a:txBody>
+                  <a:tcPr marL="44401" marR="44401" marT="22201" marB="22201" anchor="ctr">
+                    <a:lnL>
+                      <a:noFill/>
+                    </a:lnL>
+                    <a:lnR>
+                      <a:noFill/>
+                    </a:lnR>
+                    <a:lnT>
+                      <a:noFill/>
+                    </a:lnT>
+                    <a:lnB>
+                      <a:noFill/>
+                    </a:lnB>
+                    <a:noFill/>
+                  </a:tcPr>
+                </a:tc>
+                <a:tc>
+                  <a:txBody>
+                    <a:bodyPr/>
+                    <a:lstStyle/>
+                    <a:p>
+                      <a:endParaRPr lang="fr-CH" sz="1200" dirty="0"/>
+                    </a:p>
+                  </a:txBody>
+                  <a:tcPr marL="44401" marR="44401" marT="22201" marB="22201" anchor="ctr">
+                    <a:lnL>
+                      <a:noFill/>
+                    </a:lnL>
+                    <a:lnR>
+                      <a:noFill/>
+                    </a:lnR>
+                    <a:lnT>
+                      <a:noFill/>
+                    </a:lnT>
+                    <a:lnB>
+                      <a:noFill/>
+                    </a:lnB>
+                    <a:noFill/>
+                  </a:tcPr>
+                </a:tc>
+                <a:extLst>
+                  <a:ext uri="{0D108BD9-81ED-4DB2-BD59-A6C34878D82A}">
+                    <a16:rowId xmlns:a16="http://schemas.microsoft.com/office/drawing/2014/main" val="712058720"/>
+                  </a:ext>
+                </a:extLst>
+              </a:tr>
+              <a:tr h="444014">
+                <a:tc>
+                  <a:txBody>
+                    <a:bodyPr/>
+                    <a:lstStyle/>
+                    <a:p>
+                      <a:r>
+                        <a:rPr lang="en-US" sz="1200" dirty="0"/>
+                        <a:t> Only one cause realized</a:t>
+                      </a:r>
+                    </a:p>
+                  </a:txBody>
+                  <a:tcPr marL="44401" marR="44401" marT="22201" marB="22201" anchor="ctr">
+                    <a:lnL>
+                      <a:noFill/>
+                    </a:lnL>
+                    <a:lnR>
+                      <a:noFill/>
+                    </a:lnR>
+                    <a:lnT>
+                      <a:noFill/>
+                    </a:lnT>
+                    <a:lnB>
+                      <a:noFill/>
+                    </a:lnB>
+                    <a:noFill/>
+                  </a:tcPr>
+                </a:tc>
+                <a:tc>
+                  <a:txBody>
+                    <a:bodyPr/>
+                    <a:lstStyle/>
+                    <a:p>
+                      <a:r>
+                        <a:rPr lang="en-US" sz="1200"/>
+                        <a:t>Removal of frail individuals from risk pool for other causes</a:t>
+                      </a:r>
+                    </a:p>
+                  </a:txBody>
+                  <a:tcPr marL="44401" marR="44401" marT="22201" marB="22201" anchor="ctr">
+                    <a:lnL>
+                      <a:noFill/>
+                    </a:lnL>
+                    <a:lnR>
+                      <a:noFill/>
+                    </a:lnR>
+                    <a:lnT>
+                      <a:noFill/>
+                    </a:lnT>
+                    <a:lnB>
+                      <a:noFill/>
+                    </a:lnB>
+                    <a:noFill/>
+                  </a:tcPr>
+                </a:tc>
+                <a:tc>
+                  <a:txBody>
+                    <a:bodyPr/>
+                    <a:lstStyle/>
+                    <a:p>
+                      <a:endParaRPr lang="fr-CH" sz="1200"/>
+                    </a:p>
+                  </a:txBody>
+                  <a:tcPr marL="44401" marR="44401" marT="22201" marB="22201" anchor="ctr">
+                    <a:lnL>
+                      <a:noFill/>
+                    </a:lnL>
+                    <a:lnR>
+                      <a:noFill/>
+                    </a:lnR>
+                    <a:lnT>
+                      <a:noFill/>
+                    </a:lnT>
+                    <a:lnB>
+                      <a:noFill/>
+                    </a:lnB>
+                    <a:noFill/>
+                  </a:tcPr>
+                </a:tc>
+                <a:tc>
+                  <a:txBody>
+                    <a:bodyPr/>
+                    <a:lstStyle/>
+                    <a:p>
+                      <a:endParaRPr lang="fr-CH" sz="1200" dirty="0"/>
+                    </a:p>
+                  </a:txBody>
+                  <a:tcPr marL="44401" marR="44401" marT="22201" marB="22201" anchor="ctr">
+                    <a:lnL>
+                      <a:noFill/>
+                    </a:lnL>
+                    <a:lnR>
+                      <a:noFill/>
+                    </a:lnR>
+                    <a:lnT>
+                      <a:noFill/>
+                    </a:lnT>
+                    <a:lnB>
+                      <a:noFill/>
+                    </a:lnB>
+                    <a:noFill/>
+                  </a:tcPr>
+                </a:tc>
+                <a:extLst>
+                  <a:ext uri="{0D108BD9-81ED-4DB2-BD59-A6C34878D82A}">
+                    <a16:rowId xmlns:a16="http://schemas.microsoft.com/office/drawing/2014/main" val="1005727847"/>
+                  </a:ext>
+                </a:extLst>
+              </a:tr>
+              <a:tr h="310810">
+                <a:tc>
+                  <a:txBody>
+                    <a:bodyPr/>
+                    <a:lstStyle/>
+                    <a:p>
+                      <a:r>
+                        <a:rPr lang="fr-CH" sz="1200" b="1" dirty="0"/>
+                        <a:t>3. </a:t>
+                      </a:r>
+                      <a:r>
+                        <a:rPr lang="fr-CH" sz="1200" b="1" dirty="0" err="1"/>
+                        <a:t>Misclassification</a:t>
+                      </a:r>
+                      <a:r>
+                        <a:rPr lang="fr-CH" sz="1200" b="1" dirty="0"/>
+                        <a:t> / Attribution</a:t>
+                      </a:r>
+                      <a:endParaRPr lang="fr-CH" sz="1200" dirty="0"/>
+                    </a:p>
+                  </a:txBody>
+                  <a:tcPr marL="44401" marR="44401" marT="22201" marB="22201" anchor="ctr">
+                    <a:lnL>
+                      <a:noFill/>
+                    </a:lnL>
+                    <a:lnR>
+                      <a:noFill/>
+                    </a:lnR>
+                    <a:lnT>
+                      <a:noFill/>
+                    </a:lnT>
+                    <a:lnB>
+                      <a:noFill/>
+                    </a:lnB>
+                    <a:noFill/>
+                  </a:tcPr>
+                </a:tc>
+                <a:tc>
+                  <a:txBody>
+                    <a:bodyPr/>
+                    <a:lstStyle/>
+                    <a:p>
+                      <a:r>
+                        <a:rPr lang="fr-CH" sz="1200" b="1"/>
+                        <a:t>Measurement artifact</a:t>
+                      </a:r>
+                      <a:endParaRPr lang="fr-CH" sz="1200"/>
+                    </a:p>
+                  </a:txBody>
+                  <a:tcPr marL="44401" marR="44401" marT="22201" marB="22201" anchor="ctr">
+                    <a:lnL>
+                      <a:noFill/>
+                    </a:lnL>
+                    <a:lnR>
+                      <a:noFill/>
+                    </a:lnR>
+                    <a:lnT>
+                      <a:noFill/>
+                    </a:lnT>
+                    <a:lnB>
+                      <a:noFill/>
+                    </a:lnB>
+                    <a:noFill/>
+                  </a:tcPr>
+                </a:tc>
+                <a:tc>
+                  <a:txBody>
+                    <a:bodyPr/>
+                    <a:lstStyle/>
+                    <a:p>
+                      <a:endParaRPr lang="fr-CH" sz="1200" dirty="0"/>
+                    </a:p>
+                  </a:txBody>
+                  <a:tcPr marL="44401" marR="44401" marT="22201" marB="22201" anchor="ctr">
+                    <a:lnL>
+                      <a:noFill/>
+                    </a:lnL>
+                    <a:lnR>
+                      <a:noFill/>
+                    </a:lnR>
+                    <a:lnT>
+                      <a:noFill/>
+                    </a:lnT>
+                    <a:lnB>
+                      <a:noFill/>
+                    </a:lnB>
+                    <a:noFill/>
+                  </a:tcPr>
+                </a:tc>
+                <a:tc>
+                  <a:txBody>
+                    <a:bodyPr/>
+                    <a:lstStyle/>
+                    <a:p>
+                      <a:endParaRPr lang="fr-CH" sz="1200" dirty="0"/>
+                    </a:p>
+                  </a:txBody>
+                  <a:tcPr marL="44401" marR="44401" marT="22201" marB="22201" anchor="ctr">
+                    <a:lnL>
+                      <a:noFill/>
+                    </a:lnL>
+                    <a:lnR>
+                      <a:noFill/>
+                    </a:lnR>
+                    <a:lnT>
+                      <a:noFill/>
+                    </a:lnT>
+                    <a:lnB>
+                      <a:noFill/>
+                    </a:lnB>
+                    <a:noFill/>
+                  </a:tcPr>
+                </a:tc>
+                <a:extLst>
+                  <a:ext uri="{0D108BD9-81ED-4DB2-BD59-A6C34878D82A}">
+                    <a16:rowId xmlns:a16="http://schemas.microsoft.com/office/drawing/2014/main" val="2952125570"/>
+                  </a:ext>
+                </a:extLst>
+              </a:tr>
+              <a:tr h="177606">
+                <a:tc>
+                  <a:txBody>
+                    <a:bodyPr/>
+                    <a:lstStyle/>
+                    <a:p>
+                      <a:r>
+                        <a:rPr lang="fr-CH" sz="1200" dirty="0"/>
+                        <a:t> Obs(CVD) ≠ </a:t>
+                      </a:r>
+                      <a:r>
+                        <a:rPr lang="fr-CH" sz="1200" dirty="0" err="1"/>
+                        <a:t>True</a:t>
+                      </a:r>
+                      <a:r>
+                        <a:rPr lang="fr-CH" sz="1200" dirty="0"/>
+                        <a:t>(CVD)</a:t>
+                      </a:r>
+                    </a:p>
+                  </a:txBody>
+                  <a:tcPr marL="44401" marR="44401" marT="22201" marB="22201" anchor="ctr">
+                    <a:lnL>
+                      <a:noFill/>
+                    </a:lnL>
+                    <a:lnR>
+                      <a:noFill/>
+                    </a:lnR>
+                    <a:lnT>
+                      <a:noFill/>
+                    </a:lnT>
+                    <a:lnB>
+                      <a:noFill/>
+                    </a:lnB>
+                    <a:noFill/>
+                  </a:tcPr>
+                </a:tc>
+                <a:tc>
+                  <a:txBody>
+                    <a:bodyPr/>
+                    <a:lstStyle/>
+                    <a:p>
+                      <a:endParaRPr lang="fr-CH" sz="1200" dirty="0"/>
+                    </a:p>
+                  </a:txBody>
+                  <a:tcPr marL="44401" marR="44401" marT="22201" marB="22201" anchor="ctr">
+                    <a:lnL>
+                      <a:noFill/>
+                    </a:lnL>
+                    <a:lnR>
+                      <a:noFill/>
+                    </a:lnR>
+                    <a:lnT>
+                      <a:noFill/>
+                    </a:lnT>
+                    <a:lnB>
+                      <a:noFill/>
+                    </a:lnB>
+                    <a:noFill/>
+                  </a:tcPr>
+                </a:tc>
+                <a:tc>
+                  <a:txBody>
+                    <a:bodyPr/>
+                    <a:lstStyle/>
+                    <a:p>
+                      <a:endParaRPr lang="fr-CH" sz="1200"/>
+                    </a:p>
+                  </a:txBody>
+                  <a:tcPr marL="44401" marR="44401" marT="22201" marB="22201" anchor="ctr">
+                    <a:lnL>
+                      <a:noFill/>
+                    </a:lnL>
+                    <a:lnR>
+                      <a:noFill/>
+                    </a:lnR>
+                    <a:lnT>
+                      <a:noFill/>
+                    </a:lnT>
+                    <a:lnB>
+                      <a:noFill/>
+                    </a:lnB>
+                    <a:noFill/>
+                  </a:tcPr>
+                </a:tc>
+                <a:tc>
+                  <a:txBody>
+                    <a:bodyPr/>
+                    <a:lstStyle/>
+                    <a:p>
+                      <a:endParaRPr lang="fr-CH" sz="1200" dirty="0"/>
+                    </a:p>
+                  </a:txBody>
+                  <a:tcPr marL="44401" marR="44401" marT="22201" marB="22201" anchor="ctr">
+                    <a:lnL>
+                      <a:noFill/>
+                    </a:lnL>
+                    <a:lnR>
+                      <a:noFill/>
+                    </a:lnR>
+                    <a:lnT>
+                      <a:noFill/>
+                    </a:lnT>
+                    <a:lnB>
+                      <a:noFill/>
+                    </a:lnB>
+                    <a:noFill/>
+                  </a:tcPr>
+                </a:tc>
+                <a:extLst>
+                  <a:ext uri="{0D108BD9-81ED-4DB2-BD59-A6C34878D82A}">
+                    <a16:rowId xmlns:a16="http://schemas.microsoft.com/office/drawing/2014/main" val="3999062782"/>
+                  </a:ext>
+                </a:extLst>
+              </a:tr>
+              <a:tr h="310810">
+                <a:tc>
+                  <a:txBody>
+                    <a:bodyPr/>
+                    <a:lstStyle/>
+                    <a:p>
+                      <a:r>
+                        <a:rPr lang="en-US" sz="1200" dirty="0"/>
+                        <a:t> Misclassification due to testing/coding</a:t>
+                      </a:r>
+                    </a:p>
+                  </a:txBody>
+                  <a:tcPr marL="44401" marR="44401" marT="22201" marB="22201" anchor="ctr">
+                    <a:lnL>
+                      <a:noFill/>
+                    </a:lnL>
+                    <a:lnR>
+                      <a:noFill/>
+                    </a:lnR>
+                    <a:lnT>
+                      <a:noFill/>
+                    </a:lnT>
+                    <a:lnB>
+                      <a:noFill/>
+                    </a:lnB>
+                    <a:noFill/>
+                  </a:tcPr>
+                </a:tc>
+                <a:tc>
+                  <a:txBody>
+                    <a:bodyPr/>
+                    <a:lstStyle/>
+                    <a:p>
+                      <a:r>
+                        <a:rPr lang="en-US" sz="1200"/>
+                        <a:t>Statistical bias; not a real link</a:t>
+                      </a:r>
+                    </a:p>
+                  </a:txBody>
+                  <a:tcPr marL="44401" marR="44401" marT="22201" marB="22201" anchor="ctr">
+                    <a:lnL>
+                      <a:noFill/>
+                    </a:lnL>
+                    <a:lnR>
+                      <a:noFill/>
+                    </a:lnR>
+                    <a:lnT>
+                      <a:noFill/>
+                    </a:lnT>
+                    <a:lnB>
+                      <a:noFill/>
+                    </a:lnB>
+                    <a:noFill/>
+                  </a:tcPr>
+                </a:tc>
+                <a:tc>
+                  <a:txBody>
+                    <a:bodyPr/>
+                    <a:lstStyle/>
+                    <a:p>
+                      <a:endParaRPr lang="fr-CH" sz="1200"/>
+                    </a:p>
+                  </a:txBody>
+                  <a:tcPr marL="44401" marR="44401" marT="22201" marB="22201" anchor="ctr">
+                    <a:lnL>
+                      <a:noFill/>
+                    </a:lnL>
+                    <a:lnR>
+                      <a:noFill/>
+                    </a:lnR>
+                    <a:lnT>
+                      <a:noFill/>
+                    </a:lnT>
+                    <a:lnB>
+                      <a:noFill/>
+                    </a:lnB>
+                    <a:noFill/>
+                  </a:tcPr>
+                </a:tc>
+                <a:tc>
+                  <a:txBody>
+                    <a:bodyPr/>
+                    <a:lstStyle/>
+                    <a:p>
+                      <a:endParaRPr lang="fr-CH" sz="1200" dirty="0"/>
+                    </a:p>
+                  </a:txBody>
+                  <a:tcPr marL="44401" marR="44401" marT="22201" marB="22201" anchor="ctr">
+                    <a:lnL>
+                      <a:noFill/>
+                    </a:lnL>
+                    <a:lnR>
+                      <a:noFill/>
+                    </a:lnR>
+                    <a:lnT>
+                      <a:noFill/>
+                    </a:lnT>
+                    <a:lnB>
+                      <a:noFill/>
+                    </a:lnB>
+                    <a:noFill/>
+                  </a:tcPr>
+                </a:tc>
+                <a:extLst>
+                  <a:ext uri="{0D108BD9-81ED-4DB2-BD59-A6C34878D82A}">
+                    <a16:rowId xmlns:a16="http://schemas.microsoft.com/office/drawing/2014/main" val="3466465765"/>
+                  </a:ext>
+                </a:extLst>
+              </a:tr>
+              <a:tr h="310810">
+                <a:tc>
+                  <a:txBody>
+                    <a:bodyPr/>
+                    <a:lstStyle/>
+                    <a:p>
+                      <a:r>
+                        <a:rPr lang="fr-CH" sz="1200" b="1" dirty="0"/>
+                        <a:t>4. </a:t>
+                      </a:r>
+                      <a:r>
+                        <a:rPr lang="fr-CH" sz="1200" b="1" dirty="0" err="1"/>
+                        <a:t>Biological</a:t>
+                      </a:r>
+                      <a:r>
+                        <a:rPr lang="fr-CH" sz="1200" b="1" dirty="0"/>
+                        <a:t> Causal </a:t>
+                      </a:r>
+                      <a:r>
+                        <a:rPr lang="fr-CH" sz="1200" b="1" dirty="0" err="1"/>
+                        <a:t>Mediation</a:t>
+                      </a:r>
+                      <a:endParaRPr lang="fr-CH" sz="1200" dirty="0"/>
+                    </a:p>
+                  </a:txBody>
+                  <a:tcPr marL="44401" marR="44401" marT="22201" marB="22201" anchor="ctr">
+                    <a:lnL>
+                      <a:noFill/>
+                    </a:lnL>
+                    <a:lnR>
+                      <a:noFill/>
+                    </a:lnR>
+                    <a:lnT>
+                      <a:noFill/>
+                    </a:lnT>
+                    <a:lnB>
+                      <a:noFill/>
+                    </a:lnB>
+                    <a:noFill/>
+                  </a:tcPr>
+                </a:tc>
+                <a:tc>
+                  <a:txBody>
+                    <a:bodyPr/>
+                    <a:lstStyle/>
+                    <a:p>
+                      <a:r>
+                        <a:rPr lang="fr-CH" sz="1200" b="1"/>
+                        <a:t>Direct or mediated causation</a:t>
+                      </a:r>
+                      <a:endParaRPr lang="fr-CH" sz="1200"/>
+                    </a:p>
+                  </a:txBody>
+                  <a:tcPr marL="44401" marR="44401" marT="22201" marB="22201" anchor="ctr">
+                    <a:lnL>
+                      <a:noFill/>
+                    </a:lnL>
+                    <a:lnR>
+                      <a:noFill/>
+                    </a:lnR>
+                    <a:lnT>
+                      <a:noFill/>
+                    </a:lnT>
+                    <a:lnB>
+                      <a:noFill/>
+                    </a:lnB>
+                    <a:noFill/>
+                  </a:tcPr>
+                </a:tc>
+                <a:tc>
+                  <a:txBody>
+                    <a:bodyPr/>
+                    <a:lstStyle/>
+                    <a:p>
+                      <a:endParaRPr lang="fr-CH" sz="1200"/>
+                    </a:p>
+                  </a:txBody>
+                  <a:tcPr marL="44401" marR="44401" marT="22201" marB="22201" anchor="ctr">
+                    <a:lnL>
+                      <a:noFill/>
+                    </a:lnL>
+                    <a:lnR>
+                      <a:noFill/>
+                    </a:lnR>
+                    <a:lnT>
+                      <a:noFill/>
+                    </a:lnT>
+                    <a:lnB>
+                      <a:noFill/>
+                    </a:lnB>
+                    <a:noFill/>
+                  </a:tcPr>
+                </a:tc>
+                <a:tc>
+                  <a:txBody>
+                    <a:bodyPr/>
+                    <a:lstStyle/>
+                    <a:p>
+                      <a:endParaRPr lang="fr-CH" sz="1200" dirty="0"/>
+                    </a:p>
+                  </a:txBody>
+                  <a:tcPr marL="44401" marR="44401" marT="22201" marB="22201" anchor="ctr">
+                    <a:lnL>
+                      <a:noFill/>
+                    </a:lnL>
+                    <a:lnR>
+                      <a:noFill/>
+                    </a:lnR>
+                    <a:lnT>
+                      <a:noFill/>
+                    </a:lnT>
+                    <a:lnB>
+                      <a:noFill/>
+                    </a:lnB>
+                    <a:noFill/>
+                  </a:tcPr>
+                </a:tc>
+                <a:extLst>
+                  <a:ext uri="{0D108BD9-81ED-4DB2-BD59-A6C34878D82A}">
+                    <a16:rowId xmlns:a16="http://schemas.microsoft.com/office/drawing/2014/main" val="890984397"/>
+                  </a:ext>
+                </a:extLst>
+              </a:tr>
+              <a:tr h="444014">
+                <a:tc>
+                  <a:txBody>
+                    <a:bodyPr/>
+                    <a:lstStyle/>
+                    <a:p>
+                      <a:r>
+                        <a:rPr lang="fr-CH" sz="1200" dirty="0"/>
+                        <a:t> </a:t>
+                      </a:r>
+                      <a:r>
+                        <a:rPr lang="fr-CH" sz="1200" dirty="0" err="1"/>
+                        <a:t>Resp</a:t>
+                      </a:r>
+                      <a:r>
+                        <a:rPr lang="fr-CH" sz="1200" dirty="0"/>
+                        <a:t> infection </a:t>
+                      </a:r>
+                      <a:r>
+                        <a:rPr lang="en-US" sz="1200" dirty="0"/>
+                        <a:t>→</a:t>
+                      </a:r>
+                      <a:r>
+                        <a:rPr lang="fr-CH" sz="1200" dirty="0"/>
+                        <a:t> Inflammation </a:t>
+                      </a:r>
+                      <a:r>
+                        <a:rPr lang="en-US" sz="1200" dirty="0"/>
+                        <a:t>→</a:t>
+                      </a:r>
+                      <a:r>
+                        <a:rPr lang="fr-CH" sz="1200" dirty="0"/>
+                        <a:t> CVD </a:t>
+                      </a:r>
+                      <a:r>
+                        <a:rPr lang="fr-CH" sz="1200" dirty="0" err="1"/>
+                        <a:t>death</a:t>
+                      </a:r>
+                      <a:endParaRPr lang="fr-CH" sz="1200" dirty="0"/>
+                    </a:p>
+                  </a:txBody>
+                  <a:tcPr marL="44401" marR="44401" marT="22201" marB="22201" anchor="ctr">
+                    <a:lnL>
+                      <a:noFill/>
+                    </a:lnL>
+                    <a:lnR>
+                      <a:noFill/>
+                    </a:lnR>
+                    <a:lnT>
+                      <a:noFill/>
+                    </a:lnT>
+                    <a:lnB>
+                      <a:noFill/>
+                    </a:lnB>
+                    <a:noFill/>
+                  </a:tcPr>
+                </a:tc>
+                <a:tc>
+                  <a:txBody>
+                    <a:bodyPr/>
+                    <a:lstStyle/>
+                    <a:p>
+                      <a:r>
+                        <a:rPr lang="en-US" sz="1200"/>
+                        <a:t>Real physiological pathway; individual-level causation</a:t>
+                      </a:r>
+                    </a:p>
+                  </a:txBody>
+                  <a:tcPr marL="44401" marR="44401" marT="22201" marB="22201" anchor="ctr">
+                    <a:lnL>
+                      <a:noFill/>
+                    </a:lnL>
+                    <a:lnR>
+                      <a:noFill/>
+                    </a:lnR>
+                    <a:lnT>
+                      <a:noFill/>
+                    </a:lnT>
+                    <a:lnB>
+                      <a:noFill/>
+                    </a:lnB>
+                    <a:noFill/>
+                  </a:tcPr>
+                </a:tc>
+                <a:tc>
+                  <a:txBody>
+                    <a:bodyPr/>
+                    <a:lstStyle/>
+                    <a:p>
+                      <a:endParaRPr lang="fr-CH" sz="1200"/>
+                    </a:p>
+                  </a:txBody>
+                  <a:tcPr marL="44401" marR="44401" marT="22201" marB="22201" anchor="ctr">
+                    <a:lnL>
+                      <a:noFill/>
+                    </a:lnL>
+                    <a:lnR>
+                      <a:noFill/>
+                    </a:lnR>
+                    <a:lnT>
+                      <a:noFill/>
+                    </a:lnT>
+                    <a:lnB>
+                      <a:noFill/>
+                    </a:lnB>
+                    <a:noFill/>
+                  </a:tcPr>
+                </a:tc>
+                <a:tc>
+                  <a:txBody>
+                    <a:bodyPr/>
+                    <a:lstStyle/>
+                    <a:p>
+                      <a:endParaRPr lang="fr-CH" sz="1200" dirty="0"/>
+                    </a:p>
+                  </a:txBody>
+                  <a:tcPr marL="44401" marR="44401" marT="22201" marB="22201" anchor="ctr">
+                    <a:lnL>
+                      <a:noFill/>
+                    </a:lnL>
+                    <a:lnR>
+                      <a:noFill/>
+                    </a:lnR>
+                    <a:lnT>
+                      <a:noFill/>
+                    </a:lnT>
+                    <a:lnB>
+                      <a:noFill/>
+                    </a:lnB>
+                    <a:noFill/>
+                  </a:tcPr>
+                </a:tc>
+                <a:extLst>
+                  <a:ext uri="{0D108BD9-81ED-4DB2-BD59-A6C34878D82A}">
+                    <a16:rowId xmlns:a16="http://schemas.microsoft.com/office/drawing/2014/main" val="1647135072"/>
+                  </a:ext>
+                </a:extLst>
+              </a:tr>
+              <a:tr h="310810">
+                <a:tc>
+                  <a:txBody>
+                    <a:bodyPr/>
+                    <a:lstStyle/>
+                    <a:p>
+                      <a:r>
+                        <a:rPr lang="fr-CH" sz="1200" b="1" dirty="0"/>
+                        <a:t>5. Healthcare Disruption</a:t>
+                      </a:r>
+                      <a:endParaRPr lang="fr-CH" sz="1200" dirty="0"/>
+                    </a:p>
+                  </a:txBody>
+                  <a:tcPr marL="44401" marR="44401" marT="22201" marB="22201" anchor="ctr">
+                    <a:lnL>
+                      <a:noFill/>
+                    </a:lnL>
+                    <a:lnR>
+                      <a:noFill/>
+                    </a:lnR>
+                    <a:lnT>
+                      <a:noFill/>
+                    </a:lnT>
+                    <a:lnB>
+                      <a:noFill/>
+                    </a:lnB>
+                    <a:noFill/>
+                  </a:tcPr>
+                </a:tc>
+                <a:tc>
+                  <a:txBody>
+                    <a:bodyPr/>
+                    <a:lstStyle/>
+                    <a:p>
+                      <a:r>
+                        <a:rPr lang="en-US" sz="1200" b="1"/>
+                        <a:t>Indirect causation via system mediator</a:t>
+                      </a:r>
+                      <a:endParaRPr lang="en-US" sz="1200"/>
+                    </a:p>
+                  </a:txBody>
+                  <a:tcPr marL="44401" marR="44401" marT="22201" marB="22201" anchor="ctr">
+                    <a:lnL>
+                      <a:noFill/>
+                    </a:lnL>
+                    <a:lnR>
+                      <a:noFill/>
+                    </a:lnR>
+                    <a:lnT>
+                      <a:noFill/>
+                    </a:lnT>
+                    <a:lnB>
+                      <a:noFill/>
+                    </a:lnB>
+                    <a:noFill/>
+                  </a:tcPr>
+                </a:tc>
+                <a:tc>
+                  <a:txBody>
+                    <a:bodyPr/>
+                    <a:lstStyle/>
+                    <a:p>
+                      <a:endParaRPr lang="fr-CH" sz="1200"/>
+                    </a:p>
+                  </a:txBody>
+                  <a:tcPr marL="44401" marR="44401" marT="22201" marB="22201" anchor="ctr">
+                    <a:lnL>
+                      <a:noFill/>
+                    </a:lnL>
+                    <a:lnR>
+                      <a:noFill/>
+                    </a:lnR>
+                    <a:lnT>
+                      <a:noFill/>
+                    </a:lnT>
+                    <a:lnB>
+                      <a:noFill/>
+                    </a:lnB>
+                    <a:noFill/>
+                  </a:tcPr>
+                </a:tc>
+                <a:tc>
+                  <a:txBody>
+                    <a:bodyPr/>
+                    <a:lstStyle/>
+                    <a:p>
+                      <a:endParaRPr lang="fr-CH" sz="1200" dirty="0"/>
+                    </a:p>
+                  </a:txBody>
+                  <a:tcPr marL="44401" marR="44401" marT="22201" marB="22201" anchor="ctr">
+                    <a:lnL>
+                      <a:noFill/>
+                    </a:lnL>
+                    <a:lnR>
+                      <a:noFill/>
+                    </a:lnR>
+                    <a:lnT>
+                      <a:noFill/>
+                    </a:lnT>
+                    <a:lnB>
+                      <a:noFill/>
+                    </a:lnB>
+                    <a:noFill/>
+                  </a:tcPr>
+                </a:tc>
+                <a:extLst>
+                  <a:ext uri="{0D108BD9-81ED-4DB2-BD59-A6C34878D82A}">
+                    <a16:rowId xmlns:a16="http://schemas.microsoft.com/office/drawing/2014/main" val="3229942373"/>
+                  </a:ext>
+                </a:extLst>
+              </a:tr>
+              <a:tr h="444014">
+                <a:tc>
+                  <a:txBody>
+                    <a:bodyPr/>
+                    <a:lstStyle/>
+                    <a:p>
+                      <a:r>
+                        <a:rPr lang="fr-CH" sz="1200" dirty="0"/>
+                        <a:t> </a:t>
+                      </a:r>
+                      <a:r>
+                        <a:rPr lang="fr-CH" sz="1200" dirty="0" err="1"/>
+                        <a:t>Resp</a:t>
+                      </a:r>
+                      <a:r>
+                        <a:rPr lang="fr-CH" sz="1200" dirty="0"/>
+                        <a:t> </a:t>
+                      </a:r>
+                      <a:r>
+                        <a:rPr lang="fr-CH" sz="1200" dirty="0" err="1"/>
+                        <a:t>wave</a:t>
+                      </a:r>
+                      <a:r>
+                        <a:rPr lang="fr-CH" sz="1200" dirty="0"/>
+                        <a:t> </a:t>
+                      </a:r>
+                      <a:r>
+                        <a:rPr lang="en-US" sz="1200" dirty="0"/>
+                        <a:t>→</a:t>
+                      </a:r>
+                      <a:r>
+                        <a:rPr lang="fr-CH" sz="1200" dirty="0"/>
+                        <a:t> Hospital </a:t>
+                      </a:r>
+                      <a:r>
+                        <a:rPr lang="fr-CH" sz="1200" dirty="0" err="1"/>
+                        <a:t>overload</a:t>
+                      </a:r>
+                      <a:r>
+                        <a:rPr lang="fr-CH" sz="1200" dirty="0"/>
+                        <a:t> </a:t>
+                      </a:r>
+                      <a:r>
+                        <a:rPr lang="en-US" sz="1200" dirty="0"/>
+                        <a:t>→</a:t>
+                      </a:r>
+                      <a:r>
+                        <a:rPr lang="fr-CH" sz="1200" dirty="0"/>
+                        <a:t> CVD </a:t>
+                      </a:r>
+                      <a:r>
+                        <a:rPr lang="fr-CH" sz="1200" dirty="0" err="1"/>
+                        <a:t>mortality</a:t>
+                      </a:r>
+                      <a:endParaRPr lang="fr-CH" sz="1200" dirty="0"/>
+                    </a:p>
+                  </a:txBody>
+                  <a:tcPr marL="44401" marR="44401" marT="22201" marB="22201" anchor="ctr">
+                    <a:lnL>
+                      <a:noFill/>
+                    </a:lnL>
+                    <a:lnR>
+                      <a:noFill/>
+                    </a:lnR>
+                    <a:lnT>
+                      <a:noFill/>
+                    </a:lnT>
+                    <a:lnB>
+                      <a:noFill/>
+                    </a:lnB>
+                    <a:noFill/>
+                  </a:tcPr>
+                </a:tc>
+                <a:tc>
+                  <a:txBody>
+                    <a:bodyPr/>
+                    <a:lstStyle/>
+                    <a:p>
+                      <a:r>
+                        <a:rPr lang="en-US" sz="1200" dirty="0"/>
+                        <a:t>Causal but indirect; system-level mediation</a:t>
+                      </a:r>
+                    </a:p>
+                  </a:txBody>
+                  <a:tcPr marL="44401" marR="44401" marT="22201" marB="22201" anchor="ctr">
+                    <a:lnL>
+                      <a:noFill/>
+                    </a:lnL>
+                    <a:lnR>
+                      <a:noFill/>
+                    </a:lnR>
+                    <a:lnT>
+                      <a:noFill/>
+                    </a:lnT>
+                    <a:lnB>
+                      <a:noFill/>
+                    </a:lnB>
+                    <a:noFill/>
+                  </a:tcPr>
+                </a:tc>
+                <a:tc>
+                  <a:txBody>
+                    <a:bodyPr/>
+                    <a:lstStyle/>
+                    <a:p>
+                      <a:endParaRPr lang="fr-CH" sz="1200"/>
+                    </a:p>
+                  </a:txBody>
+                  <a:tcPr marL="44401" marR="44401" marT="22201" marB="22201" anchor="ctr">
+                    <a:lnL>
+                      <a:noFill/>
+                    </a:lnL>
+                    <a:lnR>
+                      <a:noFill/>
+                    </a:lnR>
+                    <a:lnT>
+                      <a:noFill/>
+                    </a:lnT>
+                    <a:lnB>
+                      <a:noFill/>
+                    </a:lnB>
+                    <a:noFill/>
+                  </a:tcPr>
+                </a:tc>
+                <a:tc>
+                  <a:txBody>
+                    <a:bodyPr/>
+                    <a:lstStyle/>
+                    <a:p>
+                      <a:endParaRPr lang="fr-CH" sz="1200" dirty="0"/>
+                    </a:p>
+                  </a:txBody>
+                  <a:tcPr marL="44401" marR="44401" marT="22201" marB="22201" anchor="ctr">
+                    <a:lnL>
+                      <a:noFill/>
+                    </a:lnL>
+                    <a:lnR>
+                      <a:noFill/>
+                    </a:lnR>
+                    <a:lnT>
+                      <a:noFill/>
+                    </a:lnT>
+                    <a:lnB>
+                      <a:noFill/>
+                    </a:lnB>
+                    <a:noFill/>
+                  </a:tcPr>
+                </a:tc>
+                <a:extLst>
+                  <a:ext uri="{0D108BD9-81ED-4DB2-BD59-A6C34878D82A}">
+                    <a16:rowId xmlns:a16="http://schemas.microsoft.com/office/drawing/2014/main" val="3210326909"/>
+                  </a:ext>
+                </a:extLst>
+              </a:tr>
+            </a:tbl>
+          </a:graphicData>
+        </a:graphic>
+      </p:graphicFrame>
+    </p:spTree>
+    <p:extLst>
+      <p:ext uri="{BB962C8B-B14F-4D97-AF65-F5344CB8AC3E}">
+        <p14:creationId xmlns:p14="http://schemas.microsoft.com/office/powerpoint/2010/main" val="2004195219"/>
       </p:ext>
     </p:extLst>
   </p:cSld>
@@ -12336,8 +16355,8 @@
           </a:p>
         </p:txBody>
       </p:sp>
-      <mc:AlternateContent xmlns:mc="http://schemas.openxmlformats.org/markup-compatibility/2006">
-        <mc:Choice xmlns:a14="http://schemas.microsoft.com/office/drawing/2010/main" Requires="a14">
+      <mc:AlternateContent xmlns:mc="http://schemas.openxmlformats.org/markup-compatibility/2006" xmlns:a14="http://schemas.microsoft.com/office/drawing/2010/main">
+        <mc:Choice Requires="a14">
           <p:sp>
             <p:nvSpPr>
               <p:cNvPr id="5" name="Content Placeholder 2">
@@ -13448,7 +17467,7 @@
             </p:txBody>
           </p:sp>
         </mc:Choice>
-        <mc:Fallback>
+        <mc:Fallback xmlns="">
           <p:sp>
             <p:nvSpPr>
               <p:cNvPr id="5" name="Content Placeholder 2">
